--- a/Nowoczesna obsługa błędów w języku Python przy użyciu... torów/Rail Oriented Programming.pptx
+++ b/Nowoczesna obsługa błędów w języku Python przy użyciu... torów/Rail Oriented Programming.pptx
@@ -10,22 +10,24 @@
     <p:sldId id="258" r:id="rId4"/>
     <p:sldId id="259" r:id="rId5"/>
     <p:sldId id="269" r:id="rId6"/>
-    <p:sldId id="279" r:id="rId7"/>
-    <p:sldId id="270" r:id="rId8"/>
-    <p:sldId id="271" r:id="rId9"/>
-    <p:sldId id="272" r:id="rId10"/>
-    <p:sldId id="273" r:id="rId11"/>
-    <p:sldId id="276" r:id="rId12"/>
-    <p:sldId id="278" r:id="rId13"/>
-    <p:sldId id="260" r:id="rId14"/>
-    <p:sldId id="274" r:id="rId15"/>
-    <p:sldId id="275" r:id="rId16"/>
-    <p:sldId id="261" r:id="rId17"/>
-    <p:sldId id="262" r:id="rId18"/>
-    <p:sldId id="263" r:id="rId19"/>
-    <p:sldId id="264" r:id="rId20"/>
-    <p:sldId id="265" r:id="rId21"/>
-    <p:sldId id="280" r:id="rId22"/>
+    <p:sldId id="281" r:id="rId7"/>
+    <p:sldId id="279" r:id="rId8"/>
+    <p:sldId id="270" r:id="rId9"/>
+    <p:sldId id="271" r:id="rId10"/>
+    <p:sldId id="272" r:id="rId11"/>
+    <p:sldId id="273" r:id="rId12"/>
+    <p:sldId id="276" r:id="rId13"/>
+    <p:sldId id="278" r:id="rId14"/>
+    <p:sldId id="260" r:id="rId15"/>
+    <p:sldId id="274" r:id="rId16"/>
+    <p:sldId id="275" r:id="rId17"/>
+    <p:sldId id="261" r:id="rId18"/>
+    <p:sldId id="262" r:id="rId19"/>
+    <p:sldId id="282" r:id="rId20"/>
+    <p:sldId id="263" r:id="rId21"/>
+    <p:sldId id="264" r:id="rId22"/>
+    <p:sldId id="265" r:id="rId23"/>
+    <p:sldId id="280" r:id="rId24"/>
   </p:sldIdLst>
   <p:sldSz cx="9144000" cy="6858000" type="screen4x3"/>
   <p:notesSz cx="6858000" cy="9144000"/>
@@ -548,7 +550,7 @@
           <a:p>
             <a:fld id="{5BCAD085-E8A6-8845-BD4E-CB4CCA059FC4}" type="datetimeFigureOut">
               <a:rPr lang="en-US" smtClean="0"/>
-              <a:t>8/28/2025</a:t>
+              <a:t>8/30/2025</a:t>
             </a:fld>
             <a:endParaRPr lang="en-US"/>
           </a:p>
@@ -732,7 +734,7 @@
           <a:p>
             <a:fld id="{5BCAD085-E8A6-8845-BD4E-CB4CCA059FC4}" type="datetimeFigureOut">
               <a:rPr lang="en-US" smtClean="0"/>
-              <a:t>8/28/2025</a:t>
+              <a:t>8/30/2025</a:t>
             </a:fld>
             <a:endParaRPr lang="en-US"/>
           </a:p>
@@ -916,7 +918,7 @@
           <a:p>
             <a:fld id="{5BCAD085-E8A6-8845-BD4E-CB4CCA059FC4}" type="datetimeFigureOut">
               <a:rPr lang="en-US" smtClean="0"/>
-              <a:t>8/28/2025</a:t>
+              <a:t>8/30/2025</a:t>
             </a:fld>
             <a:endParaRPr lang="en-US"/>
           </a:p>
@@ -1086,7 +1088,7 @@
           <a:p>
             <a:fld id="{5BCAD085-E8A6-8845-BD4E-CB4CCA059FC4}" type="datetimeFigureOut">
               <a:rPr lang="en-US" smtClean="0"/>
-              <a:t>8/28/2025</a:t>
+              <a:t>8/30/2025</a:t>
             </a:fld>
             <a:endParaRPr lang="en-US"/>
           </a:p>
@@ -1411,7 +1413,7 @@
           <a:p>
             <a:fld id="{5BCAD085-E8A6-8845-BD4E-CB4CCA059FC4}" type="datetimeFigureOut">
               <a:rPr lang="en-US" smtClean="0"/>
-              <a:t>8/28/2025</a:t>
+              <a:t>8/30/2025</a:t>
             </a:fld>
             <a:endParaRPr lang="en-US"/>
           </a:p>
@@ -1809,7 +1811,7 @@
           <a:p>
             <a:fld id="{5BCAD085-E8A6-8845-BD4E-CB4CCA059FC4}" type="datetimeFigureOut">
               <a:rPr lang="en-US" smtClean="0"/>
-              <a:t>8/28/2025</a:t>
+              <a:t>8/30/2025</a:t>
             </a:fld>
             <a:endParaRPr lang="en-US"/>
           </a:p>
@@ -2243,7 +2245,7 @@
           <a:p>
             <a:fld id="{5BCAD085-E8A6-8845-BD4E-CB4CCA059FC4}" type="datetimeFigureOut">
               <a:rPr lang="en-US" smtClean="0"/>
-              <a:t>8/28/2025</a:t>
+              <a:t>8/30/2025</a:t>
             </a:fld>
             <a:endParaRPr lang="en-US"/>
           </a:p>
@@ -2371,7 +2373,7 @@
           <a:p>
             <a:fld id="{5BCAD085-E8A6-8845-BD4E-CB4CCA059FC4}" type="datetimeFigureOut">
               <a:rPr lang="en-US" smtClean="0"/>
-              <a:t>8/28/2025</a:t>
+              <a:t>8/30/2025</a:t>
             </a:fld>
             <a:endParaRPr lang="en-US"/>
           </a:p>
@@ -2476,7 +2478,7 @@
           <a:p>
             <a:fld id="{5BCAD085-E8A6-8845-BD4E-CB4CCA059FC4}" type="datetimeFigureOut">
               <a:rPr lang="en-US" smtClean="0"/>
-              <a:t>8/28/2025</a:t>
+              <a:t>8/30/2025</a:t>
             </a:fld>
             <a:endParaRPr lang="en-US"/>
           </a:p>
@@ -2917,7 +2919,7 @@
           <a:p>
             <a:fld id="{5BCAD085-E8A6-8845-BD4E-CB4CCA059FC4}" type="datetimeFigureOut">
               <a:rPr lang="en-US" smtClean="0"/>
-              <a:t>8/28/2025</a:t>
+              <a:t>8/30/2025</a:t>
             </a:fld>
             <a:endParaRPr lang="en-US"/>
           </a:p>
@@ -3344,7 +3346,7 @@
           <a:p>
             <a:fld id="{5BCAD085-E8A6-8845-BD4E-CB4CCA059FC4}" type="datetimeFigureOut">
               <a:rPr lang="en-US" smtClean="0"/>
-              <a:t>8/28/2025</a:t>
+              <a:t>8/30/2025</a:t>
             </a:fld>
             <a:endParaRPr lang="en-US"/>
           </a:p>
@@ -3631,7 +3633,7 @@
             <a:fld id="{5BCAD085-E8A6-8845-BD4E-CB4CCA059FC4}" type="datetimeFigureOut">
               <a:rPr lang="en-US" smtClean="0"/>
               <a:pPr/>
-              <a:t>8/28/2025</a:t>
+              <a:t>8/30/2025</a:t>
             </a:fld>
             <a:endParaRPr lang="en-US" dirty="0"/>
           </a:p>
@@ -4168,10 +4170,15 @@
             <p:ph type="subTitle" idx="1"/>
           </p:nvPr>
         </p:nvSpPr>
-        <p:spPr/>
+        <p:spPr>
+          <a:xfrm>
+            <a:off x="802386" y="4389120"/>
+            <a:ext cx="7732014" cy="1783080"/>
+          </a:xfrm>
+        </p:spPr>
         <p:txBody>
           <a:bodyPr>
-            <a:normAutofit fontScale="55000" lnSpcReduction="20000"/>
+            <a:normAutofit fontScale="70000" lnSpcReduction="20000"/>
           </a:bodyPr>
           <a:lstStyle/>
           <a:p>
@@ -4209,33 +4216,33 @@
               </a:lnSpc>
             </a:pPr>
             <a:r>
-              <a:rPr lang="fr-FR" dirty="0">
+              <a:rPr lang="fr-FR" sz="2900" dirty="0">
                 <a:latin typeface="Segoe UI Semibold" panose="020B0702040204020203" pitchFamily="34" charset="0"/>
                 <a:cs typeface="Segoe UI Semibold" panose="020B0702040204020203" pitchFamily="34" charset="0"/>
               </a:rPr>
               <a:t>Artur Lew,</a:t>
             </a:r>
             <a:br>
-              <a:rPr lang="fr-FR" dirty="0">
+              <a:rPr lang="fr-FR" sz="2900" dirty="0">
                 <a:latin typeface="Segoe UI Semibold" panose="020B0702040204020203" pitchFamily="34" charset="0"/>
                 <a:cs typeface="Segoe UI Semibold" panose="020B0702040204020203" pitchFamily="34" charset="0"/>
               </a:rPr>
             </a:br>
             <a:r>
-              <a:rPr lang="fr-FR" dirty="0" err="1">
+              <a:rPr lang="fr-FR" sz="2900" dirty="0" err="1">
                 <a:latin typeface="Segoe UI Semibold" panose="020B0702040204020203" pitchFamily="34" charset="0"/>
                 <a:cs typeface="Segoe UI Semibold" panose="020B0702040204020203" pitchFamily="34" charset="0"/>
               </a:rPr>
               <a:t>PyCon</a:t>
             </a:r>
             <a:r>
-              <a:rPr lang="fr-FR" dirty="0">
+              <a:rPr lang="fr-FR" sz="2900" dirty="0">
                 <a:latin typeface="Segoe UI Semibold" panose="020B0702040204020203" pitchFamily="34" charset="0"/>
                 <a:cs typeface="Segoe UI Semibold" panose="020B0702040204020203" pitchFamily="34" charset="0"/>
               </a:rPr>
               <a:t> PL 2025</a:t>
             </a:r>
-            <a:endParaRPr lang="pl-PL" dirty="0">
+            <a:endParaRPr lang="pl-PL" sz="2900" dirty="0">
               <a:latin typeface="Segoe UI Semibold" panose="020B0702040204020203" pitchFamily="34" charset="0"/>
               <a:cs typeface="Segoe UI Semibold" panose="020B0702040204020203" pitchFamily="34" charset="0"/>
             </a:endParaRPr>
@@ -4247,13 +4254,13 @@
               </a:lnSpc>
             </a:pPr>
             <a:r>
-              <a:rPr lang="pl-PL">
+              <a:rPr lang="pl-PL" sz="2300" dirty="0">
                 <a:latin typeface="Segoe UI Semibold" panose="020B0702040204020203" pitchFamily="34" charset="0"/>
                 <a:cs typeface="Segoe UI Semibold" panose="020B0702040204020203" pitchFamily="34" charset="0"/>
               </a:rPr>
               <a:t>Gliwice 30.08</a:t>
             </a:r>
-            <a:endParaRPr lang="fr-FR" dirty="0">
+            <a:endParaRPr lang="fr-FR" sz="2300" dirty="0">
               <a:latin typeface="Segoe UI Semibold" panose="020B0702040204020203" pitchFamily="34" charset="0"/>
               <a:cs typeface="Segoe UI Semibold" panose="020B0702040204020203" pitchFamily="34" charset="0"/>
             </a:endParaRPr>
@@ -4332,7 +4339,7 @@
         <p:cNvPr id="1" name="">
           <a:extLst>
             <a:ext uri="{FF2B5EF4-FFF2-40B4-BE49-F238E27FC236}">
-              <a16:creationId xmlns:a16="http://schemas.microsoft.com/office/drawing/2014/main" id="{9E8D225A-12CE-7471-D01A-2726DE100995}"/>
+              <a16:creationId xmlns:a16="http://schemas.microsoft.com/office/drawing/2014/main" id="{26E0047A-6714-9835-E34F-01470907A69E}"/>
             </a:ext>
           </a:extLst>
         </p:cNvPr>
@@ -4352,7 +4359,7 @@
           <p:cNvPr id="2" name="Title 1">
             <a:extLst>
               <a:ext uri="{FF2B5EF4-FFF2-40B4-BE49-F238E27FC236}">
-                <a16:creationId xmlns:a16="http://schemas.microsoft.com/office/drawing/2014/main" id="{08404FAA-D246-093E-370F-BFFFDA055114}"/>
+                <a16:creationId xmlns:a16="http://schemas.microsoft.com/office/drawing/2014/main" id="{D70BD27B-59C2-39A6-D7F4-AAC7187CD9CE}"/>
               </a:ext>
             </a:extLst>
           </p:cNvPr>
@@ -4379,7 +4386,7 @@
           <p:cNvPr id="3" name="Content Placeholder 2">
             <a:extLst>
               <a:ext uri="{FF2B5EF4-FFF2-40B4-BE49-F238E27FC236}">
-                <a16:creationId xmlns:a16="http://schemas.microsoft.com/office/drawing/2014/main" id="{74B54573-4FDE-EF71-AE8E-1D26CDA93091}"/>
+                <a16:creationId xmlns:a16="http://schemas.microsoft.com/office/drawing/2014/main" id="{FF5DFD3A-4571-457C-F4CC-1B30338338FF}"/>
               </a:ext>
             </a:extLst>
           </p:cNvPr>
@@ -4399,93 +4406,68 @@
               <a:defRPr sz="2000"/>
             </a:pPr>
             <a:r>
+              <a:rPr lang="pl-PL" dirty="0"/>
+              <a:t>Erlang ➡️ </a:t>
+            </a:r>
+            <a:r>
               <a:rPr lang="pl-PL" dirty="0" err="1"/>
-              <a:t>Haskell</a:t>
-            </a:r>
-            <a:r>
-              <a:rPr lang="pl-PL" dirty="0"/>
-              <a:t> - </a:t>
+              <a:t>Krotki</a:t>
+            </a:r>
+            <a:r>
+              <a:rPr lang="pl-PL" dirty="0"/>
+              <a:t> {ok, Val} | {error, </a:t>
             </a:r>
             <a:r>
               <a:rPr lang="pl-PL" dirty="0" err="1"/>
-              <a:t>Either</a:t>
-            </a:r>
-            <a:r>
-              <a:rPr lang="pl-PL" dirty="0"/>
-              <a:t> e a, czysto funkcyjne podejście.</a:t>
+              <a:t>Reason</a:t>
+            </a:r>
+            <a:r>
+              <a:rPr lang="pl-PL" dirty="0"/>
+              <a:t>}, brak klasycznych wyjątków.</a:t>
             </a:r>
           </a:p>
           <a:p>
             <a:pPr marL="0" indent="0">
               <a:buNone/>
             </a:pPr>
-            <a:r>
-              <a:rPr lang="en-US" dirty="0"/>
-              <a:t>divide :: Int -&gt; Int -&gt; Either String Int</a:t>
-            </a:r>
-          </a:p>
-          <a:p>
-            <a:pPr marL="0" indent="0">
-              <a:buNone/>
-            </a:pPr>
-            <a:r>
-              <a:rPr lang="en-US" dirty="0"/>
-              <a:t>divide _ 0 = Left "division by zero"</a:t>
-            </a:r>
-          </a:p>
-          <a:p>
-            <a:pPr marL="0" indent="0">
-              <a:buNone/>
-            </a:pPr>
-            <a:r>
-              <a:rPr lang="en-US" dirty="0"/>
-              <a:t>divide a b = Right (a `div` b)</a:t>
-            </a:r>
-          </a:p>
-          <a:p>
-            <a:pPr marL="0" indent="0">
-              <a:buNone/>
-            </a:pPr>
-            <a:br>
-              <a:rPr lang="en-US" dirty="0"/>
-            </a:br>
-            <a:r>
-              <a:rPr lang="en-US" dirty="0"/>
-              <a:t>main = case divide 10 0 of</a:t>
-            </a:r>
-          </a:p>
-          <a:p>
-            <a:pPr marL="0" indent="0">
-              <a:buNone/>
-            </a:pPr>
-            <a:r>
-              <a:rPr lang="en-US" dirty="0"/>
-              <a:t>    Right result -&gt; print result</a:t>
-            </a:r>
-          </a:p>
-          <a:p>
-            <a:pPr marL="0" indent="0">
-              <a:buNone/>
-            </a:pPr>
-            <a:r>
-              <a:rPr lang="en-US" dirty="0"/>
-              <a:t>    Left err -&gt; </a:t>
-            </a:r>
-            <a:r>
-              <a:rPr lang="en-US" dirty="0" err="1"/>
-              <a:t>putStrLn</a:t>
-            </a:r>
-            <a:r>
-              <a:rPr lang="en-US" dirty="0"/>
-              <a:t> ("Error: " ++ err)</a:t>
-            </a:r>
-          </a:p>
-        </p:txBody>
-      </p:sp>
+            <a:endParaRPr lang="pl-PL" dirty="0" err="1"/>
+          </a:p>
+        </p:txBody>
+      </p:sp>
+      <p:pic>
+        <p:nvPicPr>
+          <p:cNvPr id="5" name="Obraz 4">
+            <a:extLst>
+              <a:ext uri="{FF2B5EF4-FFF2-40B4-BE49-F238E27FC236}">
+                <a16:creationId xmlns:a16="http://schemas.microsoft.com/office/drawing/2014/main" id="{BF3A36AC-F05D-8192-5046-A485451AC8FC}"/>
+              </a:ext>
+            </a:extLst>
+          </p:cNvPr>
+          <p:cNvPicPr>
+            <a:picLocks noChangeAspect="1"/>
+          </p:cNvPicPr>
+          <p:nvPr/>
+        </p:nvPicPr>
+        <p:blipFill>
+          <a:blip r:embed="rId3"/>
+          <a:stretch>
+            <a:fillRect/>
+          </a:stretch>
+        </p:blipFill>
+        <p:spPr>
+          <a:xfrm>
+            <a:off x="857250" y="2876550"/>
+            <a:ext cx="7665319" cy="2282270"/>
+          </a:xfrm>
+          <a:prstGeom prst="rect">
+            <a:avLst/>
+          </a:prstGeom>
+        </p:spPr>
+      </p:pic>
     </p:spTree>
     <p:extLst>
       <p:ext uri="{BB962C8B-B14F-4D97-AF65-F5344CB8AC3E}">
-        <p14:creationId xmlns:p14="http://schemas.microsoft.com/office/powerpoint/2010/main" val="508004498"/>
+        <p14:creationId xmlns:p14="http://schemas.microsoft.com/office/powerpoint/2010/main" val="2859846394"/>
       </p:ext>
     </p:extLst>
   </p:cSld>
@@ -4514,7 +4496,13 @@
     </p:bg>
     <p:spTree>
       <p:nvGrpSpPr>
-        <p:cNvPr id="1" name=""/>
+        <p:cNvPr id="1" name="">
+          <a:extLst>
+            <a:ext uri="{FF2B5EF4-FFF2-40B4-BE49-F238E27FC236}">
+              <a16:creationId xmlns:a16="http://schemas.microsoft.com/office/drawing/2014/main" id="{9E8D225A-12CE-7471-D01A-2726DE100995}"/>
+            </a:ext>
+          </a:extLst>
+        </p:cNvPr>
         <p:cNvGrpSpPr/>
         <p:nvPr/>
       </p:nvGrpSpPr>
@@ -4528,10 +4516,10 @@
       </p:grpSpPr>
       <p:sp>
         <p:nvSpPr>
-          <p:cNvPr id="2" name="Tytuł 1">
+          <p:cNvPr id="2" name="Title 1">
             <a:extLst>
               <a:ext uri="{FF2B5EF4-FFF2-40B4-BE49-F238E27FC236}">
-                <a16:creationId xmlns:a16="http://schemas.microsoft.com/office/drawing/2014/main" id="{CAB2F24E-71A6-55BB-764E-5CD753AFB1D8}"/>
+                <a16:creationId xmlns:a16="http://schemas.microsoft.com/office/drawing/2014/main" id="{08404FAA-D246-093E-370F-BFFFDA055114}"/>
               </a:ext>
             </a:extLst>
           </p:cNvPr>
@@ -4548,18 +4536,17 @@
           <a:lstStyle/>
           <a:p>
             <a:r>
-              <a:rPr lang="pl-PL" dirty="0"/>
-              <a:t>Najbardziej eleganckie rozwiązanie?</a:t>
-            </a:r>
-          </a:p>
-        </p:txBody>
-      </p:sp>
-      <p:sp>
-        <p:nvSpPr>
-          <p:cNvPr id="3" name="Symbol zastępczy zawartości 2">
+              <a:t>Porównanie z innymi językami</a:t>
+            </a:r>
+          </a:p>
+        </p:txBody>
+      </p:sp>
+      <p:sp>
+        <p:nvSpPr>
+          <p:cNvPr id="3" name="Content Placeholder 2">
             <a:extLst>
               <a:ext uri="{FF2B5EF4-FFF2-40B4-BE49-F238E27FC236}">
-                <a16:creationId xmlns:a16="http://schemas.microsoft.com/office/drawing/2014/main" id="{C999961D-CDE3-3FC4-5F42-4BDB1E7FFC79}"/>
+                <a16:creationId xmlns:a16="http://schemas.microsoft.com/office/drawing/2014/main" id="{74B54573-4FDE-EF71-AE8E-1D26CDA93091}"/>
               </a:ext>
             </a:extLst>
           </p:cNvPr>
@@ -4575,29 +4562,16 @@
           <a:bodyPr/>
           <a:lstStyle/>
           <a:p>
-            <a:r>
-              <a:rPr lang="pl-PL" dirty="0" err="1"/>
-              <a:t>Rust</a:t>
-            </a:r>
-            <a:r>
-              <a:rPr lang="pl-PL" dirty="0"/>
-              <a:t> / </a:t>
-            </a:r>
+            <a:pPr>
+              <a:defRPr sz="2000"/>
+            </a:pPr>
             <a:r>
               <a:rPr lang="pl-PL" dirty="0" err="1"/>
               <a:t>Haskell</a:t>
             </a:r>
             <a:r>
               <a:rPr lang="pl-PL" dirty="0"/>
-              <a:t> / Erlang – bo wymuszają jawne błędy w typach (</a:t>
-            </a:r>
-            <a:r>
-              <a:rPr lang="pl-PL" dirty="0" err="1"/>
-              <a:t>Result</a:t>
-            </a:r>
-            <a:r>
-              <a:rPr lang="pl-PL" dirty="0"/>
-              <a:t>, </a:t>
+              <a:t> - </a:t>
             </a:r>
             <a:r>
               <a:rPr lang="pl-PL" dirty="0" err="1"/>
@@ -4605,54 +4579,45 @@
             </a:r>
             <a:r>
               <a:rPr lang="pl-PL" dirty="0"/>
-              <a:t>, </a:t>
-            </a:r>
-            <a:r>
-              <a:rPr lang="pl-PL" dirty="0" err="1"/>
-              <a:t>krotki</a:t>
-            </a:r>
-            <a:r>
-              <a:rPr lang="pl-PL" dirty="0"/>
-              <a:t>).</a:t>
-            </a:r>
-          </a:p>
-          <a:p>
-            <a:r>
-              <a:rPr lang="pl-PL" dirty="0"/>
-              <a:t>Go jest prosty, ale powtarzalny („error </a:t>
-            </a:r>
-            <a:r>
-              <a:rPr lang="pl-PL" dirty="0" err="1"/>
-              <a:t>handling</a:t>
-            </a:r>
-            <a:r>
-              <a:rPr lang="pl-PL" dirty="0"/>
-              <a:t> </a:t>
-            </a:r>
-            <a:r>
-              <a:rPr lang="pl-PL" dirty="0" err="1"/>
-              <a:t>boilerplate</a:t>
-            </a:r>
-            <a:r>
-              <a:rPr lang="pl-PL" dirty="0"/>
-              <a:t>”).</a:t>
-            </a:r>
-          </a:p>
-          <a:p>
-            <a:r>
-              <a:rPr lang="pl-PL" dirty="0"/>
-              <a:t>Java / C# mają ukryte wyjątki 👉mniej przewidywalne.</a:t>
-            </a:r>
-          </a:p>
-          <a:p>
-            <a:endParaRPr lang="pl-PL" dirty="0"/>
-          </a:p>
-        </p:txBody>
-      </p:sp>
+              <a:t> e a, czysto funkcyjne podejście.</a:t>
+            </a:r>
+          </a:p>
+        </p:txBody>
+      </p:sp>
+      <p:pic>
+        <p:nvPicPr>
+          <p:cNvPr id="5" name="Obraz 4">
+            <a:extLst>
+              <a:ext uri="{FF2B5EF4-FFF2-40B4-BE49-F238E27FC236}">
+                <a16:creationId xmlns:a16="http://schemas.microsoft.com/office/drawing/2014/main" id="{5EB28054-156A-07C3-FE9F-EF9635D71553}"/>
+              </a:ext>
+            </a:extLst>
+          </p:cNvPr>
+          <p:cNvPicPr>
+            <a:picLocks noChangeAspect="1"/>
+          </p:cNvPicPr>
+          <p:nvPr/>
+        </p:nvPicPr>
+        <p:blipFill>
+          <a:blip r:embed="rId3"/>
+          <a:stretch>
+            <a:fillRect/>
+          </a:stretch>
+        </p:blipFill>
+        <p:spPr>
+          <a:xfrm>
+            <a:off x="851896" y="2652466"/>
+            <a:ext cx="6395131" cy="2668834"/>
+          </a:xfrm>
+          <a:prstGeom prst="rect">
+            <a:avLst/>
+          </a:prstGeom>
+        </p:spPr>
+      </p:pic>
     </p:spTree>
     <p:extLst>
       <p:ext uri="{BB962C8B-B14F-4D97-AF65-F5344CB8AC3E}">
-        <p14:creationId xmlns:p14="http://schemas.microsoft.com/office/powerpoint/2010/main" val="1406592319"/>
+        <p14:creationId xmlns:p14="http://schemas.microsoft.com/office/powerpoint/2010/main" val="508004498"/>
       </p:ext>
     </p:extLst>
   </p:cSld>
@@ -4698,7 +4663,7 @@
           <p:cNvPr id="2" name="Tytuł 1">
             <a:extLst>
               <a:ext uri="{FF2B5EF4-FFF2-40B4-BE49-F238E27FC236}">
-                <a16:creationId xmlns:a16="http://schemas.microsoft.com/office/drawing/2014/main" id="{8B9CD8D8-4B37-58BD-F2D3-804EC87C2B03}"/>
+                <a16:creationId xmlns:a16="http://schemas.microsoft.com/office/drawing/2014/main" id="{CAB2F24E-71A6-55BB-764E-5CD753AFB1D8}"/>
               </a:ext>
             </a:extLst>
           </p:cNvPr>
@@ -4716,7 +4681,7 @@
           <a:p>
             <a:r>
               <a:rPr lang="pl-PL" dirty="0"/>
-              <a:t>Co to jest monada?</a:t>
+              <a:t>Najbardziej eleganckie rozwiązanie?</a:t>
             </a:r>
           </a:p>
         </p:txBody>
@@ -4726,7 +4691,7 @@
           <p:cNvPr id="3" name="Symbol zastępczy zawartości 2">
             <a:extLst>
               <a:ext uri="{FF2B5EF4-FFF2-40B4-BE49-F238E27FC236}">
-                <a16:creationId xmlns:a16="http://schemas.microsoft.com/office/drawing/2014/main" id="{DE3B2F86-53F8-9F1F-CED7-9E8B342EFBD1}"/>
+                <a16:creationId xmlns:a16="http://schemas.microsoft.com/office/drawing/2014/main" id="{C999961D-CDE3-3FC4-5F42-4BDB1E7FFC79}"/>
               </a:ext>
             </a:extLst>
           </p:cNvPr>
@@ -4739,68 +4704,32 @@
         </p:nvSpPr>
         <p:spPr/>
         <p:txBody>
-          <a:bodyPr>
-            <a:normAutofit/>
-          </a:bodyPr>
+          <a:bodyPr/>
           <a:lstStyle/>
           <a:p>
             <a:r>
-              <a:rPr lang="pl-PL" dirty="0"/>
-              <a:t>Monada to wzorzec abstrakcyjny w programowaniu funkcyjnym.</a:t>
-            </a:r>
-          </a:p>
-          <a:p>
-            <a:r>
-              <a:rPr lang="pl-PL" dirty="0"/>
-              <a:t>Definiuje sposób łączenia obliczeń sekwencyjnie, z zachowaniem kontekstu (np. błędu, listy, IO).</a:t>
-            </a:r>
-          </a:p>
-          <a:p>
-            <a:r>
-              <a:rPr lang="pl-PL" dirty="0"/>
-              <a:t>Składa się z:</a:t>
-            </a:r>
-          </a:p>
-          <a:p>
-            <a:pPr lvl="1"/>
-            <a:r>
-              <a:rPr lang="pl-PL" dirty="0"/>
-              <a:t>unit / return – pakuje wartość w monadę.</a:t>
-            </a:r>
-          </a:p>
-          <a:p>
-            <a:pPr lvl="1"/>
-            <a:r>
-              <a:rPr lang="pl-PL" dirty="0"/>
-              <a:t>bind (&gt;&gt;=) – łączy funkcje zwracające monady w łańcuch.</a:t>
-            </a:r>
-          </a:p>
-          <a:p>
-            <a:r>
-              <a:rPr lang="pl-PL" dirty="0"/>
-              <a:t>Przykłady:</a:t>
-            </a:r>
-          </a:p>
-          <a:p>
-            <a:pPr lvl="1"/>
-            <a:r>
               <a:rPr lang="pl-PL" dirty="0" err="1"/>
-              <a:t>Maybe</a:t>
-            </a:r>
-            <a:r>
-              <a:rPr lang="pl-PL" dirty="0"/>
-              <a:t> – reprezentuje wartość lub brak.</a:t>
-            </a:r>
-          </a:p>
-          <a:p>
-            <a:pPr lvl="1"/>
+              <a:t>Rust</a:t>
+            </a:r>
+            <a:r>
+              <a:rPr lang="pl-PL" dirty="0"/>
+              <a:t> / </a:t>
+            </a:r>
+            <a:r>
+              <a:rPr lang="pl-PL" dirty="0" err="1"/>
+              <a:t>Haskell</a:t>
+            </a:r>
+            <a:r>
+              <a:rPr lang="pl-PL" dirty="0"/>
+              <a:t> / Erlang – bo wymuszają jawne błędy w typach (</a:t>
+            </a:r>
             <a:r>
               <a:rPr lang="pl-PL" dirty="0" err="1"/>
               <a:t>Result</a:t>
             </a:r>
             <a:r>
               <a:rPr lang="pl-PL" dirty="0"/>
-              <a:t> / </a:t>
+              <a:t>, </a:t>
             </a:r>
             <a:r>
               <a:rPr lang="pl-PL" dirty="0" err="1"/>
@@ -4808,14 +4737,43 @@
             </a:r>
             <a:r>
               <a:rPr lang="pl-PL" dirty="0"/>
-              <a:t> – reprezentuje sukces lub błąd.</a:t>
-            </a:r>
-          </a:p>
-          <a:p>
-            <a:pPr lvl="1"/>
-            <a:r>
-              <a:rPr lang="pl-PL" dirty="0"/>
-              <a:t>IO – obliczenia z efektami ubocznymi.</a:t>
+              <a:t>, </a:t>
+            </a:r>
+            <a:r>
+              <a:rPr lang="pl-PL" dirty="0" err="1"/>
+              <a:t>krotki</a:t>
+            </a:r>
+            <a:r>
+              <a:rPr lang="pl-PL" dirty="0"/>
+              <a:t>).</a:t>
+            </a:r>
+          </a:p>
+          <a:p>
+            <a:r>
+              <a:rPr lang="pl-PL" dirty="0"/>
+              <a:t>Go jest prosty, ale powtarzalny („error </a:t>
+            </a:r>
+            <a:r>
+              <a:rPr lang="pl-PL" dirty="0" err="1"/>
+              <a:t>handling</a:t>
+            </a:r>
+            <a:r>
+              <a:rPr lang="pl-PL" dirty="0"/>
+              <a:t> </a:t>
+            </a:r>
+            <a:r>
+              <a:rPr lang="pl-PL" dirty="0" err="1"/>
+              <a:t>boilerplate</a:t>
+            </a:r>
+            <a:r>
+              <a:rPr lang="pl-PL" dirty="0"/>
+              <a:t>”).</a:t>
+            </a:r>
+          </a:p>
+          <a:p>
+            <a:r>
+              <a:rPr lang="pl-PL" dirty="0"/>
+              <a:t>Java / C# mają ukryte wyjątki 👉mniej przewidywalne.</a:t>
             </a:r>
           </a:p>
           <a:p>
@@ -4826,7 +4784,7 @@
     </p:spTree>
     <p:extLst>
       <p:ext uri="{BB962C8B-B14F-4D97-AF65-F5344CB8AC3E}">
-        <p14:creationId xmlns:p14="http://schemas.microsoft.com/office/powerpoint/2010/main" val="3222528984"/>
+        <p14:creationId xmlns:p14="http://schemas.microsoft.com/office/powerpoint/2010/main" val="1406592319"/>
       </p:ext>
     </p:extLst>
   </p:cSld>
@@ -4869,7 +4827,13 @@
       </p:grpSpPr>
       <p:sp>
         <p:nvSpPr>
-          <p:cNvPr id="2" name="Title 1"/>
+          <p:cNvPr id="2" name="Tytuł 1">
+            <a:extLst>
+              <a:ext uri="{FF2B5EF4-FFF2-40B4-BE49-F238E27FC236}">
+                <a16:creationId xmlns:a16="http://schemas.microsoft.com/office/drawing/2014/main" id="{8B9CD8D8-4B37-58BD-F2D3-804EC87C2B03}"/>
+              </a:ext>
+            </a:extLst>
+          </p:cNvPr>
           <p:cNvSpPr>
             <a:spLocks noGrp="1"/>
           </p:cNvSpPr>
@@ -4883,15 +4847,21 @@
           <a:lstStyle/>
           <a:p>
             <a:r>
-              <a:rPr dirty="0"/>
-              <a:t>Rail Oriented Programming (ROP)</a:t>
-            </a:r>
-          </a:p>
-        </p:txBody>
-      </p:sp>
-      <p:sp>
-        <p:nvSpPr>
-          <p:cNvPr id="3" name="Content Placeholder 2"/>
+              <a:rPr lang="pl-PL" dirty="0"/>
+              <a:t>Co to jest monada?</a:t>
+            </a:r>
+          </a:p>
+        </p:txBody>
+      </p:sp>
+      <p:sp>
+        <p:nvSpPr>
+          <p:cNvPr id="3" name="Symbol zastępczy zawartości 2">
+            <a:extLst>
+              <a:ext uri="{FF2B5EF4-FFF2-40B4-BE49-F238E27FC236}">
+                <a16:creationId xmlns:a16="http://schemas.microsoft.com/office/drawing/2014/main" id="{DE3B2F86-53F8-9F1F-CED7-9E8B342EFBD1}"/>
+              </a:ext>
+            </a:extLst>
+          </p:cNvPr>
           <p:cNvSpPr>
             <a:spLocks noGrp="1"/>
           </p:cNvSpPr>
@@ -4902,151 +4872,95 @@
         <p:spPr/>
         <p:txBody>
           <a:bodyPr>
-            <a:normAutofit fontScale="85000" lnSpcReduction="20000"/>
+            <a:normAutofit/>
           </a:bodyPr>
           <a:lstStyle/>
           <a:p>
-            <a:pPr>
-              <a:defRPr sz="2000"/>
-            </a:pPr>
-            <a:r>
-              <a:rPr dirty="0" err="1"/>
-              <a:t>Metafora</a:t>
-            </a:r>
-            <a:r>
-              <a:rPr dirty="0"/>
-              <a:t> </a:t>
-            </a:r>
-            <a:r>
-              <a:rPr dirty="0" err="1"/>
-              <a:t>torów</a:t>
-            </a:r>
-            <a:r>
-              <a:rPr dirty="0"/>
-              <a:t> </a:t>
-            </a:r>
-            <a:r>
-              <a:rPr dirty="0" err="1"/>
-              <a:t>kolejowych</a:t>
-            </a:r>
+            <a:r>
+              <a:rPr lang="pl-PL" dirty="0"/>
+              <a:t>Monada to wzorzec abstrakcyjny w programowaniu funkcyjnym.</a:t>
+            </a:r>
+          </a:p>
+          <a:p>
+            <a:r>
+              <a:rPr lang="pl-PL" dirty="0"/>
+              <a:t>Definiuje sposób łączenia obliczeń sekwencyjnie, z zachowaniem kontekstu (np. błędu, listy, IO).</a:t>
+            </a:r>
+          </a:p>
+          <a:p>
+            <a:r>
+              <a:rPr lang="pl-PL" dirty="0"/>
+              <a:t>Składa się z:</a:t>
+            </a:r>
+          </a:p>
+          <a:p>
+            <a:pPr lvl="1"/>
+            <a:r>
+              <a:rPr lang="pl-PL" dirty="0"/>
+              <a:t>unit / return – pakuje wartość w monadę.</a:t>
+            </a:r>
+          </a:p>
+          <a:p>
+            <a:pPr lvl="1"/>
+            <a:r>
+              <a:rPr lang="pl-PL" dirty="0"/>
+              <a:t>bind (&gt;&gt;=) – łączy funkcje zwracające monady w łańcuch.</a:t>
+            </a:r>
+          </a:p>
+          <a:p>
+            <a:r>
+              <a:rPr lang="pl-PL" dirty="0"/>
+              <a:t>Przykłady:</a:t>
+            </a:r>
+          </a:p>
+          <a:p>
+            <a:pPr lvl="1"/>
+            <a:r>
+              <a:rPr lang="pl-PL" dirty="0" err="1"/>
+              <a:t>Maybe</a:t>
+            </a:r>
+            <a:r>
+              <a:rPr lang="pl-PL" dirty="0"/>
+              <a:t> – reprezentuje wartość lub brak.</a:t>
+            </a:r>
+          </a:p>
+          <a:p>
+            <a:pPr lvl="1"/>
+            <a:r>
+              <a:rPr lang="pl-PL" dirty="0" err="1"/>
+              <a:t>Result</a:t>
+            </a:r>
+            <a:r>
+              <a:rPr lang="pl-PL" dirty="0"/>
+              <a:t> / </a:t>
+            </a:r>
+            <a:r>
+              <a:rPr lang="pl-PL" dirty="0" err="1"/>
+              <a:t>Either</a:t>
+            </a:r>
+            <a:r>
+              <a:rPr lang="pl-PL" dirty="0"/>
+              <a:t> – reprezentuje sukces lub błąd.</a:t>
+            </a:r>
+          </a:p>
+          <a:p>
+            <a:pPr lvl="1"/>
+            <a:r>
+              <a:rPr lang="pl-PL" dirty="0"/>
+              <a:t>IO – obliczenia z efektami ubocznymi.</a:t>
+            </a:r>
+          </a:p>
+          <a:p>
             <a:endParaRPr lang="pl-PL" dirty="0"/>
           </a:p>
-          <a:p>
-            <a:pPr>
-              <a:defRPr sz="2000"/>
-            </a:pPr>
-            <a:r>
-              <a:rPr lang="pl-PL" dirty="0"/>
-              <a:t>Dwa tory – jeden dla poprawnych wartości, drugi dla błędów</a:t>
-            </a:r>
-          </a:p>
-          <a:p>
-            <a:pPr>
-              <a:defRPr sz="2000"/>
-            </a:pPr>
-            <a:r>
-              <a:rPr lang="pl-PL" dirty="0"/>
-              <a:t>Funkcje transformujące – każda funkcja przyjmuje wartość z toru sukcesu i zwraca wynik na tor sukcesu lub przełącza na tor błędu.</a:t>
-            </a:r>
-          </a:p>
-          <a:p>
-            <a:pPr>
-              <a:defRPr sz="2000"/>
-            </a:pPr>
-            <a:r>
-              <a:rPr lang="pl-PL" dirty="0"/>
-              <a:t>Łańcuchy operacji – funkcje można łączyć (</a:t>
-            </a:r>
-            <a:r>
-              <a:rPr lang="pl-PL" dirty="0" err="1"/>
-              <a:t>pipe</a:t>
-            </a:r>
-            <a:r>
-              <a:rPr lang="pl-PL" dirty="0"/>
-              <a:t>/</a:t>
-            </a:r>
-            <a:r>
-              <a:rPr lang="pl-PL" dirty="0" err="1"/>
-              <a:t>chain</a:t>
-            </a:r>
-            <a:r>
-              <a:rPr lang="pl-PL" dirty="0"/>
-              <a:t>), a przepływ sam wybiera odpowiedni tor.</a:t>
-            </a:r>
-          </a:p>
-          <a:p>
-            <a:pPr>
-              <a:defRPr sz="2000"/>
-            </a:pPr>
-            <a:r>
-              <a:rPr lang="pl-PL" dirty="0"/>
-              <a:t>Brak wyjątków runtime – zamiast </a:t>
-            </a:r>
-            <a:r>
-              <a:rPr lang="pl-PL" dirty="0" err="1"/>
-              <a:t>try</a:t>
-            </a:r>
-            <a:r>
-              <a:rPr lang="pl-PL" dirty="0"/>
-              <a:t>/</a:t>
-            </a:r>
-            <a:r>
-              <a:rPr lang="pl-PL" dirty="0" err="1"/>
-              <a:t>except</a:t>
-            </a:r>
-            <a:r>
-              <a:rPr lang="pl-PL" dirty="0"/>
-              <a:t>, błędy są jawne i obsługiwane w przepływie danych.</a:t>
-            </a:r>
-          </a:p>
-          <a:p>
-            <a:pPr>
-              <a:defRPr sz="2000"/>
-            </a:pPr>
-            <a:r>
-              <a:rPr lang="pl-PL" dirty="0"/>
-              <a:t>Kompozycja – logika biznesowa budowana jest z małych funkcji, które można łatwo komponować.</a:t>
-            </a:r>
-          </a:p>
-          <a:p>
-            <a:pPr>
-              <a:defRPr sz="2000"/>
-            </a:pPr>
-            <a:r>
-              <a:rPr lang="pl-PL" dirty="0"/>
-              <a:t>Deklaratywność – opisujemy co się dzieje, a nie jak łapać wyjątki.</a:t>
-            </a:r>
-          </a:p>
-          <a:p>
-            <a:pPr>
-              <a:defRPr sz="2000"/>
-            </a:pPr>
-            <a:r>
-              <a:rPr lang="pl-PL" dirty="0"/>
-              <a:t>Przewidywalność – błędy nie „wyskakują” znikąd, są elementem kontraktu funkcji.</a:t>
-            </a:r>
-          </a:p>
-          <a:p>
-            <a:pPr>
-              <a:defRPr sz="2000"/>
-            </a:pPr>
-            <a:r>
-              <a:rPr lang="pl-PL" dirty="0"/>
-              <a:t>Inspiracja funkcyjna – wzorzec pochodzi z F#, </a:t>
-            </a:r>
-            <a:r>
-              <a:rPr lang="pl-PL" dirty="0" err="1"/>
-              <a:t>Haskella</a:t>
-            </a:r>
-            <a:r>
-              <a:rPr lang="pl-PL" dirty="0"/>
-              <a:t> i monad.</a:t>
-            </a:r>
-            <a:endParaRPr dirty="0"/>
-          </a:p>
         </p:txBody>
       </p:sp>
     </p:spTree>
+    <p:extLst>
+      <p:ext uri="{BB962C8B-B14F-4D97-AF65-F5344CB8AC3E}">
+        <p14:creationId xmlns:p14="http://schemas.microsoft.com/office/powerpoint/2010/main" val="3222528984"/>
+      </p:ext>
+    </p:extLst>
   </p:cSld>
   <p:clrMapOvr>
     <a:masterClrMapping/>
@@ -5087,13 +5001,7 @@
       </p:grpSpPr>
       <p:sp>
         <p:nvSpPr>
-          <p:cNvPr id="2" name="Tytuł 1">
-            <a:extLst>
-              <a:ext uri="{FF2B5EF4-FFF2-40B4-BE49-F238E27FC236}">
-                <a16:creationId xmlns:a16="http://schemas.microsoft.com/office/drawing/2014/main" id="{2CAFA0BC-6E20-8EBB-E9C4-1BD377439F53}"/>
-              </a:ext>
-            </a:extLst>
-          </p:cNvPr>
+          <p:cNvPr id="2" name="Title 1"/>
           <p:cNvSpPr>
             <a:spLocks noGrp="1"/>
           </p:cNvSpPr>
@@ -5107,73 +5015,170 @@
           <a:lstStyle/>
           <a:p>
             <a:r>
-              <a:rPr lang="pl-PL" b="1" dirty="0"/>
-              <a:t>Zalety ROP</a:t>
+              <a:rPr dirty="0"/>
+              <a:t>Rail Oriented Programming (ROP)</a:t>
+            </a:r>
+          </a:p>
+        </p:txBody>
+      </p:sp>
+      <p:sp>
+        <p:nvSpPr>
+          <p:cNvPr id="3" name="Content Placeholder 2"/>
+          <p:cNvSpPr>
+            <a:spLocks noGrp="1"/>
+          </p:cNvSpPr>
+          <p:nvPr>
+            <p:ph idx="1"/>
+          </p:nvPr>
+        </p:nvSpPr>
+        <p:spPr/>
+        <p:txBody>
+          <a:bodyPr>
+            <a:normAutofit fontScale="85000" lnSpcReduction="20000"/>
+          </a:bodyPr>
+          <a:lstStyle/>
+          <a:p>
+            <a:pPr>
+              <a:defRPr sz="2000"/>
+            </a:pPr>
+            <a:r>
+              <a:rPr dirty="0" err="1"/>
+              <a:t>Metafora</a:t>
+            </a:r>
+            <a:r>
+              <a:rPr dirty="0"/>
+              <a:t> </a:t>
+            </a:r>
+            <a:r>
+              <a:rPr dirty="0" err="1"/>
+              <a:t>torów</a:t>
+            </a:r>
+            <a:r>
+              <a:rPr dirty="0"/>
+              <a:t> </a:t>
+            </a:r>
+            <a:r>
+              <a:rPr dirty="0" err="1"/>
+              <a:t>kolejowych</a:t>
             </a:r>
             <a:endParaRPr lang="pl-PL" dirty="0"/>
           </a:p>
-        </p:txBody>
-      </p:sp>
-      <p:sp>
-        <p:nvSpPr>
-          <p:cNvPr id="3" name="Symbol zastępczy zawartości 2">
-            <a:extLst>
-              <a:ext uri="{FF2B5EF4-FFF2-40B4-BE49-F238E27FC236}">
-                <a16:creationId xmlns:a16="http://schemas.microsoft.com/office/drawing/2014/main" id="{81C497A7-FE1A-45A5-E164-BD2FE10C148B}"/>
-              </a:ext>
-            </a:extLst>
-          </p:cNvPr>
-          <p:cNvSpPr>
-            <a:spLocks noGrp="1"/>
-          </p:cNvSpPr>
-          <p:nvPr>
-            <p:ph idx="1"/>
-          </p:nvPr>
-        </p:nvSpPr>
-        <p:spPr/>
-        <p:txBody>
-          <a:bodyPr/>
-          <a:lstStyle/>
-          <a:p>
-            <a:r>
-              <a:rPr lang="pl-PL" dirty="0"/>
-              <a:t>Łatwiejsza kompozycja funkcji.</a:t>
-            </a:r>
-          </a:p>
-          <a:p>
-            <a:r>
-              <a:rPr lang="pl-PL" dirty="0"/>
-              <a:t>Błędy obsługiwane jawnie, brak ukrytych wyjątków.</a:t>
-            </a:r>
-          </a:p>
-          <a:p>
-            <a:r>
-              <a:rPr lang="pl-PL" dirty="0"/>
-              <a:t>Kod bardziej przewidywalny i testowalny.</a:t>
-            </a:r>
-          </a:p>
-          <a:p>
-            <a:r>
-              <a:rPr lang="pl-PL" dirty="0"/>
-              <a:t>Umożliwia pisanie bardziej funkcyjnego </a:t>
+          <a:p>
+            <a:pPr>
+              <a:defRPr sz="2000"/>
+            </a:pPr>
+            <a:r>
+              <a:rPr lang="pl-PL" dirty="0"/>
+              <a:t>Dwa tory – jeden dla poprawnych wartości, drugi dla błędów</a:t>
+            </a:r>
+          </a:p>
+          <a:p>
+            <a:pPr>
+              <a:defRPr sz="2000"/>
+            </a:pPr>
+            <a:r>
+              <a:rPr lang="pl-PL" dirty="0"/>
+              <a:t>Funkcje transformujące – każda funkcja przyjmuje wartość z toru sukcesu i zwraca wynik na tor sukcesu lub przełącza na tor błędu.</a:t>
+            </a:r>
+          </a:p>
+          <a:p>
+            <a:pPr>
+              <a:defRPr sz="2000"/>
+            </a:pPr>
+            <a:r>
+              <a:rPr lang="pl-PL" dirty="0"/>
+              <a:t>Łańcuchy operacji – funkcje można łączyć (</a:t>
             </a:r>
             <a:r>
               <a:rPr lang="pl-PL" dirty="0" err="1"/>
-              <a:t>Pythona</a:t>
-            </a:r>
-            <a:r>
-              <a:rPr lang="pl-PL" dirty="0"/>
-              <a:t>.</a:t>
-            </a:r>
+              <a:t>pipe</a:t>
+            </a:r>
+            <a:r>
+              <a:rPr lang="pl-PL" dirty="0"/>
+              <a:t>/</a:t>
+            </a:r>
+            <a:r>
+              <a:rPr lang="pl-PL" dirty="0" err="1"/>
+              <a:t>chain</a:t>
+            </a:r>
+            <a:r>
+              <a:rPr lang="pl-PL" dirty="0"/>
+              <a:t>), a przepływ sam wybiera odpowiedni tor.</a:t>
+            </a:r>
+          </a:p>
+          <a:p>
+            <a:pPr>
+              <a:defRPr sz="2000"/>
+            </a:pPr>
+            <a:r>
+              <a:rPr lang="pl-PL" dirty="0"/>
+              <a:t>Brak wyjątków runtime – zamiast </a:t>
+            </a:r>
+            <a:r>
+              <a:rPr lang="pl-PL" dirty="0" err="1"/>
+              <a:t>try</a:t>
+            </a:r>
+            <a:r>
+              <a:rPr lang="pl-PL" dirty="0"/>
+              <a:t>/</a:t>
+            </a:r>
+            <a:r>
+              <a:rPr lang="pl-PL" dirty="0" err="1"/>
+              <a:t>except</a:t>
+            </a:r>
+            <a:r>
+              <a:rPr lang="pl-PL" dirty="0"/>
+              <a:t>, błędy są jawne i obsługiwane w przepływie danych.</a:t>
+            </a:r>
+          </a:p>
+          <a:p>
+            <a:pPr>
+              <a:defRPr sz="2000"/>
+            </a:pPr>
+            <a:r>
+              <a:rPr lang="pl-PL" dirty="0"/>
+              <a:t>Kompozycja – logika biznesowa budowana jest z małych funkcji, które można łatwo komponować.</a:t>
+            </a:r>
+          </a:p>
+          <a:p>
+            <a:pPr>
+              <a:defRPr sz="2000"/>
+            </a:pPr>
+            <a:r>
+              <a:rPr lang="pl-PL" dirty="0"/>
+              <a:t>Deklaratywność – opisujemy co się dzieje, a nie jak łapać wyjątki.</a:t>
+            </a:r>
+          </a:p>
+          <a:p>
+            <a:pPr>
+              <a:defRPr sz="2000"/>
+            </a:pPr>
+            <a:r>
+              <a:rPr lang="pl-PL" dirty="0"/>
+              <a:t>Przewidywalność – błędy nie „wyskakują” znikąd, są elementem kontraktu funkcji.</a:t>
+            </a:r>
+          </a:p>
+          <a:p>
+            <a:pPr>
+              <a:defRPr sz="2000"/>
+            </a:pPr>
+            <a:r>
+              <a:rPr lang="pl-PL" dirty="0"/>
+              <a:t>Inspiracja funkcyjna – wzorzec pochodzi z F#, </a:t>
+            </a:r>
+            <a:r>
+              <a:rPr lang="pl-PL" dirty="0" err="1"/>
+              <a:t>Haskella</a:t>
+            </a:r>
+            <a:r>
+              <a:rPr lang="pl-PL" dirty="0"/>
+              <a:t> i monad.</a:t>
+            </a:r>
+            <a:endParaRPr dirty="0"/>
           </a:p>
         </p:txBody>
       </p:sp>
     </p:spTree>
-    <p:extLst>
-      <p:ext uri="{BB962C8B-B14F-4D97-AF65-F5344CB8AC3E}">
-        <p14:creationId xmlns:p14="http://schemas.microsoft.com/office/powerpoint/2010/main" val="1764054095"/>
-      </p:ext>
-    </p:extLst>
   </p:cSld>
   <p:clrMapOvr>
     <a:masterClrMapping/>
@@ -5217,7 +5222,7 @@
           <p:cNvPr id="2" name="Tytuł 1">
             <a:extLst>
               <a:ext uri="{FF2B5EF4-FFF2-40B4-BE49-F238E27FC236}">
-                <a16:creationId xmlns:a16="http://schemas.microsoft.com/office/drawing/2014/main" id="{2048ECB3-F0AE-9D71-1DFE-9F75CA6F27F1}"/>
+                <a16:creationId xmlns:a16="http://schemas.microsoft.com/office/drawing/2014/main" id="{2CAFA0BC-6E20-8EBB-E9C4-1BD377439F53}"/>
               </a:ext>
             </a:extLst>
           </p:cNvPr>
@@ -5234,9 +5239,10 @@
           <a:lstStyle/>
           <a:p>
             <a:r>
-              <a:rPr lang="pl-PL" dirty="0"/>
-              <a:t>Wady RO</a:t>
-            </a:r>
+              <a:rPr lang="pl-PL" b="1" dirty="0"/>
+              <a:t>Zalety ROP</a:t>
+            </a:r>
+            <a:endParaRPr lang="pl-PL" dirty="0"/>
           </a:p>
         </p:txBody>
       </p:sp>
@@ -5245,7 +5251,7 @@
           <p:cNvPr id="3" name="Symbol zastępczy zawartości 2">
             <a:extLst>
               <a:ext uri="{FF2B5EF4-FFF2-40B4-BE49-F238E27FC236}">
-                <a16:creationId xmlns:a16="http://schemas.microsoft.com/office/drawing/2014/main" id="{45C3B1F5-8E91-89BA-7745-72CE7F4501AB}"/>
+                <a16:creationId xmlns:a16="http://schemas.microsoft.com/office/drawing/2014/main" id="{81C497A7-FE1A-45A5-E164-BD2FE10C148B}"/>
               </a:ext>
             </a:extLst>
           </p:cNvPr>
@@ -5263,43 +5269,33 @@
           <a:p>
             <a:r>
               <a:rPr lang="pl-PL" dirty="0"/>
-              <a:t>Większa „ceremonia” w prostych przypadkach.</a:t>
-            </a:r>
-          </a:p>
-          <a:p>
-            <a:r>
-              <a:rPr lang="pl-PL" dirty="0"/>
-              <a:t>Wymaga zmiany sposobu myślenia (nieintuicyjne dla programistów OOP).</a:t>
-            </a:r>
-          </a:p>
-          <a:p>
-            <a:r>
-              <a:rPr lang="pl-PL" dirty="0"/>
-              <a:t>Trudniejsze debugowanie, jeśli ktoś nie zna koncepcji.</a:t>
-            </a:r>
-          </a:p>
-          <a:p>
+              <a:t>Łatwiejsza kompozycja funkcji.</a:t>
+            </a:r>
+          </a:p>
+          <a:p>
+            <a:r>
+              <a:rPr lang="pl-PL" dirty="0"/>
+              <a:t>Błędy obsługiwane jawnie, brak ukrytych wyjątków.</a:t>
+            </a:r>
+          </a:p>
+          <a:p>
+            <a:r>
+              <a:rPr lang="pl-PL" dirty="0"/>
+              <a:t>Kod bardziej przewidywalny i testowalny.</a:t>
+            </a:r>
+          </a:p>
+          <a:p>
+            <a:r>
+              <a:rPr lang="pl-PL" dirty="0"/>
+              <a:t>Umożliwia pisanie bardziej funkcyjnego </a:t>
+            </a:r>
             <a:r>
               <a:rPr lang="pl-PL" dirty="0" err="1"/>
-              <a:t>Python</a:t>
-            </a:r>
-            <a:r>
-              <a:rPr lang="pl-PL" dirty="0"/>
-              <a:t> nie wspiera tego natywnie, potrzebne biblioteki (np. </a:t>
-            </a:r>
-            <a:r>
-              <a:rPr lang="pl-PL" dirty="0" err="1"/>
-              <a:t>returns</a:t>
-            </a:r>
-            <a:r>
-              <a:rPr lang="pl-PL" dirty="0"/>
-              <a:t>).</a:t>
-            </a:r>
-          </a:p>
-          <a:p>
-            <a:r>
-              <a:rPr lang="pl-PL" dirty="0"/>
-              <a:t>Opakowanie kosztuje 😉</a:t>
+              <a:t>Pythona</a:t>
+            </a:r>
+            <a:r>
+              <a:rPr lang="pl-PL" dirty="0"/>
+              <a:t>.</a:t>
             </a:r>
           </a:p>
         </p:txBody>
@@ -5307,7 +5303,7 @@
     </p:spTree>
     <p:extLst>
       <p:ext uri="{BB962C8B-B14F-4D97-AF65-F5344CB8AC3E}">
-        <p14:creationId xmlns:p14="http://schemas.microsoft.com/office/powerpoint/2010/main" val="1533517111"/>
+        <p14:creationId xmlns:p14="http://schemas.microsoft.com/office/powerpoint/2010/main" val="1764054095"/>
       </p:ext>
     </p:extLst>
   </p:cSld>
@@ -5350,7 +5346,13 @@
       </p:grpSpPr>
       <p:sp>
         <p:nvSpPr>
-          <p:cNvPr id="2" name="Title 1"/>
+          <p:cNvPr id="2" name="Tytuł 1">
+            <a:extLst>
+              <a:ext uri="{FF2B5EF4-FFF2-40B4-BE49-F238E27FC236}">
+                <a16:creationId xmlns:a16="http://schemas.microsoft.com/office/drawing/2014/main" id="{2048ECB3-F0AE-9D71-1DFE-9F75CA6F27F1}"/>
+              </a:ext>
+            </a:extLst>
+          </p:cNvPr>
           <p:cNvSpPr>
             <a:spLocks noGrp="1"/>
           </p:cNvSpPr>
@@ -5364,14 +5366,21 @@
           <a:lstStyle/>
           <a:p>
             <a:r>
-              <a:t>Biblioteka returns</a:t>
-            </a:r>
-          </a:p>
-        </p:txBody>
-      </p:sp>
-      <p:sp>
-        <p:nvSpPr>
-          <p:cNvPr id="3" name="Content Placeholder 2"/>
+              <a:rPr lang="pl-PL" dirty="0"/>
+              <a:t>Wady RO</a:t>
+            </a:r>
+          </a:p>
+        </p:txBody>
+      </p:sp>
+      <p:sp>
+        <p:nvSpPr>
+          <p:cNvPr id="3" name="Symbol zastępczy zawartości 2">
+            <a:extLst>
+              <a:ext uri="{FF2B5EF4-FFF2-40B4-BE49-F238E27FC236}">
+                <a16:creationId xmlns:a16="http://schemas.microsoft.com/office/drawing/2014/main" id="{45C3B1F5-8E91-89BA-7745-72CE7F4501AB}"/>
+              </a:ext>
+            </a:extLst>
+          </p:cNvPr>
           <p:cNvSpPr>
             <a:spLocks noGrp="1"/>
           </p:cNvSpPr>
@@ -5384,35 +5393,55 @@
           <a:bodyPr/>
           <a:lstStyle/>
           <a:p>
-            <a:endParaRPr/>
-          </a:p>
-          <a:p>
-            <a:pPr>
-              <a:defRPr sz="2000"/>
-            </a:pPr>
-            <a:r>
-              <a:t>Typy: Result, Maybe, IO, FutureResult</a:t>
-            </a:r>
-          </a:p>
-          <a:p>
-            <a:pPr>
-              <a:defRPr sz="2000"/>
-            </a:pPr>
-            <a:r>
-              <a:t>Funkcje: map, bind, alt, unwrap_or</a:t>
-            </a:r>
-          </a:p>
-          <a:p>
-            <a:pPr>
-              <a:defRPr sz="2000"/>
-            </a:pPr>
-            <a:r>
-              <a:t>Integracja z mypy (typowanie)</a:t>
+            <a:r>
+              <a:rPr lang="pl-PL" dirty="0"/>
+              <a:t>Większa „ceremonia” w prostych przypadkach.</a:t>
+            </a:r>
+          </a:p>
+          <a:p>
+            <a:r>
+              <a:rPr lang="pl-PL" dirty="0"/>
+              <a:t>Wymaga zmiany sposobu myślenia (nieintuicyjne dla programistów OOP).</a:t>
+            </a:r>
+          </a:p>
+          <a:p>
+            <a:r>
+              <a:rPr lang="pl-PL" dirty="0"/>
+              <a:t>Trudniejsze debugowanie, jeśli ktoś nie zna koncepcji.</a:t>
+            </a:r>
+          </a:p>
+          <a:p>
+            <a:r>
+              <a:rPr lang="pl-PL" dirty="0" err="1"/>
+              <a:t>Python</a:t>
+            </a:r>
+            <a:r>
+              <a:rPr lang="pl-PL" dirty="0"/>
+              <a:t> nie wspiera tego natywnie, potrzebne biblioteki (np. </a:t>
+            </a:r>
+            <a:r>
+              <a:rPr lang="pl-PL" dirty="0" err="1"/>
+              <a:t>returns</a:t>
+            </a:r>
+            <a:r>
+              <a:rPr lang="pl-PL" dirty="0"/>
+              <a:t>).</a:t>
+            </a:r>
+          </a:p>
+          <a:p>
+            <a:r>
+              <a:rPr lang="pl-PL" dirty="0"/>
+              <a:t>Opakowanie kosztuje 😉</a:t>
             </a:r>
           </a:p>
         </p:txBody>
       </p:sp>
     </p:spTree>
+    <p:extLst>
+      <p:ext uri="{BB962C8B-B14F-4D97-AF65-F5344CB8AC3E}">
+        <p14:creationId xmlns:p14="http://schemas.microsoft.com/office/powerpoint/2010/main" val="1533517111"/>
+      </p:ext>
+    </p:extLst>
   </p:cSld>
   <p:clrMapOvr>
     <a:masterClrMapping/>
@@ -5467,7 +5496,7 @@
           <a:lstStyle/>
           <a:p>
             <a:r>
-              <a:t>Przykład synchroniczny</a:t>
+              <a:t>Biblioteka returns</a:t>
             </a:r>
           </a:p>
         </p:txBody>
@@ -5487,38 +5516,145 @@
           <a:bodyPr/>
           <a:lstStyle/>
           <a:p>
-            <a:endParaRPr/>
-          </a:p>
-          <a:p>
-            <a:pPr>
-              <a:defRPr sz="2000"/>
-            </a:pPr>
-            <a:r>
-              <a:t>parse_age('21') → Success(21)</a:t>
-            </a:r>
-          </a:p>
-          <a:p>
-            <a:pPr>
-              <a:defRPr sz="2000"/>
-            </a:pPr>
-            <a:r>
-              <a:t>.bind(validate_age)</a:t>
-            </a:r>
-          </a:p>
-          <a:p>
-            <a:pPr>
-              <a:defRPr sz="2000"/>
-            </a:pPr>
-            <a:r>
-              <a:t>.map(lambda x: f'Welcome {x}')</a:t>
-            </a:r>
-          </a:p>
-          <a:p>
-            <a:pPr>
-              <a:defRPr sz="2000"/>
-            </a:pPr>
-            <a:r>
-              <a:t>→ Success('Welcome 21') lub Failure(...)</a:t>
+            <a:endParaRPr dirty="0"/>
+          </a:p>
+          <a:p>
+            <a:r>
+              <a:rPr lang="pl-PL" dirty="0"/>
+              <a:t>Implementuje monadyczne podejście znane z języków funkcyjnych w </a:t>
+            </a:r>
+            <a:r>
+              <a:rPr lang="pl-PL" dirty="0" err="1"/>
+              <a:t>Pythonie</a:t>
+            </a:r>
+            <a:r>
+              <a:rPr lang="pl-PL" dirty="0"/>
+              <a:t>.</a:t>
+            </a:r>
+          </a:p>
+          <a:p>
+            <a:r>
+              <a:rPr lang="pl-PL" dirty="0"/>
+              <a:t>Główne typy:</a:t>
+            </a:r>
+          </a:p>
+          <a:p>
+            <a:pPr lvl="1"/>
+            <a:r>
+              <a:rPr lang="pl-PL" dirty="0" err="1"/>
+              <a:t>Result</a:t>
+            </a:r>
+            <a:r>
+              <a:rPr lang="pl-PL" dirty="0"/>
+              <a:t>[a, b] – sukces (</a:t>
+            </a:r>
+            <a:r>
+              <a:rPr lang="pl-PL" dirty="0" err="1"/>
+              <a:t>Success</a:t>
+            </a:r>
+            <a:r>
+              <a:rPr lang="pl-PL" dirty="0"/>
+              <a:t>) lub błąd (</a:t>
+            </a:r>
+            <a:r>
+              <a:rPr lang="pl-PL" dirty="0" err="1"/>
+              <a:t>Failure</a:t>
+            </a:r>
+            <a:r>
+              <a:rPr lang="pl-PL" dirty="0"/>
+              <a:t>).</a:t>
+            </a:r>
+          </a:p>
+          <a:p>
+            <a:pPr lvl="1"/>
+            <a:r>
+              <a:rPr lang="pl-PL" dirty="0" err="1"/>
+              <a:t>Maybe</a:t>
+            </a:r>
+            <a:r>
+              <a:rPr lang="pl-PL" dirty="0"/>
+              <a:t>[a] – </a:t>
+            </a:r>
+            <a:r>
+              <a:rPr lang="pl-PL" dirty="0" err="1"/>
+              <a:t>Some</a:t>
+            </a:r>
+            <a:r>
+              <a:rPr lang="pl-PL" dirty="0"/>
+              <a:t> lub </a:t>
+            </a:r>
+            <a:r>
+              <a:rPr lang="pl-PL" dirty="0" err="1"/>
+              <a:t>Nothing</a:t>
+            </a:r>
+            <a:r>
+              <a:rPr lang="pl-PL" dirty="0"/>
+              <a:t>.</a:t>
+            </a:r>
+          </a:p>
+          <a:p>
+            <a:pPr lvl="1"/>
+            <a:r>
+              <a:rPr lang="pl-PL" dirty="0"/>
+              <a:t>IO, </a:t>
+            </a:r>
+            <a:r>
+              <a:rPr lang="pl-PL" dirty="0" err="1"/>
+              <a:t>FutureResult</a:t>
+            </a:r>
+            <a:r>
+              <a:rPr lang="pl-PL" dirty="0"/>
+              <a:t>, </a:t>
+            </a:r>
+            <a:r>
+              <a:rPr lang="pl-PL" dirty="0" err="1"/>
+              <a:t>RequiresContext</a:t>
+            </a:r>
+            <a:r>
+              <a:rPr lang="pl-PL" dirty="0"/>
+              <a:t>.</a:t>
+            </a:r>
+          </a:p>
+          <a:p>
+            <a:r>
+              <a:rPr lang="pl-PL" dirty="0"/>
+              <a:t>Funkcje: map, bind, alt, </a:t>
+            </a:r>
+            <a:r>
+              <a:rPr lang="pl-PL" dirty="0" err="1"/>
+              <a:t>unwrap_or</a:t>
+            </a:r>
+            <a:r>
+              <a:rPr lang="pl-PL" dirty="0"/>
+              <a:t>, </a:t>
+            </a:r>
+            <a:r>
+              <a:rPr lang="pl-PL" dirty="0" err="1"/>
+              <a:t>failure</a:t>
+            </a:r>
+            <a:r>
+              <a:rPr lang="pl-PL" dirty="0"/>
+              <a:t>(), itd.</a:t>
+            </a:r>
+          </a:p>
+          <a:p>
+            <a:r>
+              <a:rPr lang="pl-PL" dirty="0"/>
+              <a:t>Bezpieczne i przewidywalne API.</a:t>
+            </a:r>
+          </a:p>
+          <a:p>
+            <a:r>
+              <a:rPr lang="pl-PL" dirty="0"/>
+              <a:t>Zgodność z ROP (Railway </a:t>
+            </a:r>
+            <a:r>
+              <a:rPr lang="pl-PL" dirty="0" err="1"/>
+              <a:t>Oriented</a:t>
+            </a:r>
+            <a:r>
+              <a:rPr lang="pl-PL" dirty="0"/>
+              <a:t> Programming).</a:t>
             </a:r>
           </a:p>
         </p:txBody>
@@ -5578,85 +5714,43 @@
           <a:lstStyle/>
           <a:p>
             <a:r>
-              <a:t>Przykład asynchroniczny</a:t>
-            </a:r>
-          </a:p>
-        </p:txBody>
-      </p:sp>
-      <p:sp>
-        <p:nvSpPr>
-          <p:cNvPr id="3" name="Content Placeholder 2"/>
-          <p:cNvSpPr>
-            <a:spLocks noGrp="1"/>
-          </p:cNvSpPr>
+              <a:t>Przykład synchroniczny</a:t>
+            </a:r>
+          </a:p>
+        </p:txBody>
+      </p:sp>
+      <p:pic>
+        <p:nvPicPr>
+          <p:cNvPr id="5" name="Symbol zastępczy zawartości 4">
+            <a:extLst>
+              <a:ext uri="{FF2B5EF4-FFF2-40B4-BE49-F238E27FC236}">
+                <a16:creationId xmlns:a16="http://schemas.microsoft.com/office/drawing/2014/main" id="{58B81337-EECF-9EAC-14F9-69DB27E76047}"/>
+              </a:ext>
+            </a:extLst>
+          </p:cNvPr>
+          <p:cNvPicPr>
+            <a:picLocks noGrp="1" noChangeAspect="1"/>
+          </p:cNvPicPr>
           <p:nvPr>
             <p:ph idx="1"/>
           </p:nvPr>
-        </p:nvSpPr>
-        <p:spPr/>
-        <p:txBody>
-          <a:bodyPr/>
-          <a:lstStyle/>
-          <a:p>
-            <a:endParaRPr dirty="0"/>
-          </a:p>
-          <a:p>
-            <a:pPr>
-              <a:defRPr sz="2000"/>
-            </a:pPr>
-            <a:r>
-              <a:rPr dirty="0"/>
-              <a:t>@future_safe async def </a:t>
-            </a:r>
-            <a:r>
-              <a:rPr dirty="0" err="1"/>
-              <a:t>fetch_data</a:t>
-            </a:r>
-            <a:r>
-              <a:rPr dirty="0"/>
-              <a:t>(url: str) -&gt; str</a:t>
-            </a:r>
-          </a:p>
-          <a:p>
-            <a:pPr>
-              <a:defRPr sz="2000"/>
-            </a:pPr>
-            <a:r>
-              <a:rPr dirty="0"/>
-              <a:t>Result: Success(data) </a:t>
-            </a:r>
-            <a:r>
-              <a:rPr dirty="0" err="1"/>
-              <a:t>lub</a:t>
-            </a:r>
-            <a:r>
-              <a:rPr dirty="0"/>
-              <a:t> Failure(error)</a:t>
-            </a:r>
-          </a:p>
-          <a:p>
-            <a:pPr>
-              <a:defRPr sz="2000"/>
-            </a:pPr>
-            <a:r>
-              <a:rPr dirty="0" err="1"/>
-              <a:t>Łączenie</a:t>
-            </a:r>
-            <a:r>
-              <a:rPr dirty="0"/>
-              <a:t> async/await z </a:t>
-            </a:r>
-            <a:r>
-              <a:rPr dirty="0" err="1"/>
-              <a:t>monadą</a:t>
-            </a:r>
-            <a:r>
-              <a:rPr dirty="0"/>
-              <a:t> Result</a:t>
-            </a:r>
-          </a:p>
-        </p:txBody>
-      </p:sp>
+        </p:nvPicPr>
+        <p:blipFill>
+          <a:blip r:embed="rId3"/>
+          <a:stretch>
+            <a:fillRect/>
+          </a:stretch>
+        </p:blipFill>
+        <p:spPr>
+          <a:xfrm>
+            <a:off x="865006" y="1784349"/>
+            <a:ext cx="7015344" cy="4256345"/>
+          </a:xfrm>
+          <a:prstGeom prst="rect">
+            <a:avLst/>
+          </a:prstGeom>
+        </p:spPr>
+      </p:pic>
     </p:spTree>
   </p:cSld>
   <p:clrMapOvr>
@@ -5668,23 +5762,15 @@
 <file path=ppt/slides/slide19.xml><?xml version="1.0" encoding="utf-8"?>
 <p:sld xmlns:a="http://schemas.openxmlformats.org/drawingml/2006/main" xmlns:r="http://schemas.openxmlformats.org/officeDocument/2006/relationships" xmlns:p="http://schemas.openxmlformats.org/presentationml/2006/main">
   <p:cSld>
-    <p:bg>
-      <p:bgPr>
-        <a:blipFill dpi="0" rotWithShape="1">
-          <a:blip r:embed="rId2">
-            <a:lum/>
-          </a:blip>
-          <a:srcRect/>
-          <a:stretch>
-            <a:fillRect t="-17000" b="-17000"/>
-          </a:stretch>
-        </a:blipFill>
-        <a:effectLst/>
-      </p:bgPr>
-    </p:bg>
     <p:spTree>
       <p:nvGrpSpPr>
-        <p:cNvPr id="1" name=""/>
+        <p:cNvPr id="1" name="">
+          <a:extLst>
+            <a:ext uri="{FF2B5EF4-FFF2-40B4-BE49-F238E27FC236}">
+              <a16:creationId xmlns:a16="http://schemas.microsoft.com/office/drawing/2014/main" id="{6F93DBCF-C001-35A5-0B26-16F81AC7BF2B}"/>
+            </a:ext>
+          </a:extLst>
+        </p:cNvPr>
         <p:cNvGrpSpPr/>
         <p:nvPr/>
       </p:nvGrpSpPr>
@@ -5698,7 +5784,13 @@
       </p:grpSpPr>
       <p:sp>
         <p:nvSpPr>
-          <p:cNvPr id="2" name="Title 1"/>
+          <p:cNvPr id="2" name="Title 1">
+            <a:extLst>
+              <a:ext uri="{FF2B5EF4-FFF2-40B4-BE49-F238E27FC236}">
+                <a16:creationId xmlns:a16="http://schemas.microsoft.com/office/drawing/2014/main" id="{43D1287E-2F83-9A33-B2CE-D83412CCC962}"/>
+              </a:ext>
+            </a:extLst>
+          </p:cNvPr>
           <p:cNvSpPr>
             <a:spLocks noGrp="1"/>
           </p:cNvSpPr>
@@ -5712,211 +5804,49 @@
           <a:lstStyle/>
           <a:p>
             <a:r>
-              <a:t>Podsumowanie</a:t>
-            </a:r>
-          </a:p>
-        </p:txBody>
-      </p:sp>
-      <p:sp>
-        <p:nvSpPr>
-          <p:cNvPr id="3" name="Content Placeholder 2"/>
-          <p:cNvSpPr>
-            <a:spLocks noGrp="1"/>
-          </p:cNvSpPr>
+              <a:t>Przykład synchroniczny</a:t>
+            </a:r>
+          </a:p>
+        </p:txBody>
+      </p:sp>
+      <p:pic>
+        <p:nvPicPr>
+          <p:cNvPr id="7" name="Symbol zastępczy zawartości 6">
+            <a:extLst>
+              <a:ext uri="{FF2B5EF4-FFF2-40B4-BE49-F238E27FC236}">
+                <a16:creationId xmlns:a16="http://schemas.microsoft.com/office/drawing/2014/main" id="{89378CBA-3372-7217-7742-B6000CB50FFB}"/>
+              </a:ext>
+            </a:extLst>
+          </p:cNvPr>
+          <p:cNvPicPr>
+            <a:picLocks noGrp="1" noChangeAspect="1"/>
+          </p:cNvPicPr>
           <p:nvPr>
             <p:ph idx="1"/>
           </p:nvPr>
-        </p:nvSpPr>
-        <p:spPr/>
-        <p:txBody>
-          <a:bodyPr/>
-          <a:lstStyle/>
-          <a:p>
-            <a:endParaRPr dirty="0"/>
-          </a:p>
-          <a:p>
-            <a:pPr>
-              <a:defRPr sz="2000"/>
-            </a:pPr>
-            <a:r>
-              <a:rPr dirty="0" err="1"/>
-              <a:t>Wyjątki</a:t>
-            </a:r>
-            <a:r>
-              <a:rPr dirty="0"/>
-              <a:t> w </a:t>
-            </a:r>
-            <a:r>
-              <a:rPr dirty="0" err="1"/>
-              <a:t>Pythonie</a:t>
-            </a:r>
-            <a:r>
-              <a:rPr dirty="0"/>
-              <a:t> </a:t>
-            </a:r>
-            <a:r>
-              <a:rPr dirty="0" err="1"/>
-              <a:t>są</a:t>
-            </a:r>
-            <a:r>
-              <a:rPr dirty="0"/>
-              <a:t> </a:t>
-            </a:r>
-            <a:r>
-              <a:rPr dirty="0" err="1"/>
-              <a:t>elastyczne</a:t>
-            </a:r>
-            <a:r>
-              <a:rPr dirty="0"/>
-              <a:t>, ale </a:t>
-            </a:r>
-            <a:r>
-              <a:rPr dirty="0" err="1"/>
-              <a:t>mniej</a:t>
-            </a:r>
-            <a:r>
-              <a:rPr dirty="0"/>
-              <a:t> </a:t>
-            </a:r>
-            <a:r>
-              <a:rPr dirty="0" err="1"/>
-              <a:t>przewidywalne</a:t>
-            </a:r>
-            <a:endParaRPr dirty="0"/>
-          </a:p>
-          <a:p>
-            <a:pPr>
-              <a:defRPr sz="2000"/>
-            </a:pPr>
-            <a:r>
-              <a:rPr dirty="0"/>
-              <a:t>ROP = </a:t>
-            </a:r>
-            <a:r>
-              <a:rPr dirty="0" err="1"/>
-              <a:t>jawna</a:t>
-            </a:r>
-            <a:r>
-              <a:rPr dirty="0"/>
-              <a:t> </a:t>
-            </a:r>
-            <a:r>
-              <a:rPr dirty="0" err="1"/>
-              <a:t>obsługa</a:t>
-            </a:r>
-            <a:r>
-              <a:rPr dirty="0"/>
-              <a:t> </a:t>
-            </a:r>
-            <a:r>
-              <a:rPr dirty="0" err="1"/>
-              <a:t>błędów</a:t>
-            </a:r>
-            <a:r>
-              <a:rPr dirty="0"/>
-              <a:t> </a:t>
-            </a:r>
-            <a:r>
-              <a:rPr dirty="0" err="1"/>
-              <a:t>przez</a:t>
-            </a:r>
-            <a:r>
-              <a:rPr dirty="0"/>
-              <a:t> </a:t>
-            </a:r>
-            <a:r>
-              <a:rPr dirty="0" err="1"/>
-              <a:t>typy</a:t>
-            </a:r>
-            <a:r>
-              <a:rPr dirty="0"/>
-              <a:t> </a:t>
-            </a:r>
-            <a:r>
-              <a:rPr dirty="0" err="1"/>
-              <a:t>wynikowe</a:t>
-            </a:r>
-            <a:endParaRPr dirty="0"/>
-          </a:p>
-          <a:p>
-            <a:pPr>
-              <a:defRPr sz="2000"/>
-            </a:pPr>
-            <a:r>
-              <a:rPr dirty="0" err="1"/>
-              <a:t>Biblioteka</a:t>
-            </a:r>
-            <a:r>
-              <a:rPr dirty="0"/>
-              <a:t> returns </a:t>
-            </a:r>
-            <a:r>
-              <a:rPr dirty="0" err="1"/>
-              <a:t>implementuje</a:t>
-            </a:r>
-            <a:r>
-              <a:rPr dirty="0"/>
-              <a:t> </a:t>
-            </a:r>
-            <a:r>
-              <a:rPr dirty="0" err="1"/>
-              <a:t>monady</a:t>
-            </a:r>
-            <a:r>
-              <a:rPr dirty="0"/>
-              <a:t> </a:t>
-            </a:r>
-            <a:r>
-              <a:rPr dirty="0" err="1"/>
-              <a:t>funkcyjne</a:t>
-            </a:r>
-            <a:endParaRPr dirty="0"/>
-          </a:p>
-          <a:p>
-            <a:pPr>
-              <a:defRPr sz="2000"/>
-            </a:pPr>
-            <a:r>
-              <a:rPr dirty="0" err="1"/>
-              <a:t>Czytelny</a:t>
-            </a:r>
-            <a:r>
-              <a:rPr dirty="0"/>
-              <a:t> </a:t>
-            </a:r>
-            <a:r>
-              <a:rPr dirty="0" err="1"/>
-              <a:t>i</a:t>
-            </a:r>
-            <a:r>
-              <a:rPr dirty="0"/>
-              <a:t> </a:t>
-            </a:r>
-            <a:r>
-              <a:rPr dirty="0" err="1"/>
-              <a:t>skalowalny</a:t>
-            </a:r>
-            <a:r>
-              <a:rPr dirty="0"/>
-              <a:t> </a:t>
-            </a:r>
-            <a:r>
-              <a:rPr dirty="0" err="1"/>
-              <a:t>kod</a:t>
-            </a:r>
-            <a:r>
-              <a:rPr dirty="0"/>
-              <a:t> </a:t>
-            </a:r>
-            <a:r>
-              <a:rPr dirty="0" err="1"/>
-              <a:t>biznesowy</a:t>
-            </a:r>
-            <a:endParaRPr dirty="0"/>
-          </a:p>
-        </p:txBody>
-      </p:sp>
+        </p:nvPicPr>
+        <p:blipFill>
+          <a:blip r:embed="rId2"/>
+          <a:stretch>
+            <a:fillRect/>
+          </a:stretch>
+        </p:blipFill>
+        <p:spPr>
+          <a:xfrm>
+            <a:off x="838200" y="1763776"/>
+            <a:ext cx="7467600" cy="4765548"/>
+          </a:xfrm>
+          <a:prstGeom prst="rect">
+            <a:avLst/>
+          </a:prstGeom>
+        </p:spPr>
+      </p:pic>
     </p:spTree>
+    <p:extLst>
+      <p:ext uri="{BB962C8B-B14F-4D97-AF65-F5344CB8AC3E}">
+        <p14:creationId xmlns:p14="http://schemas.microsoft.com/office/powerpoint/2010/main" val="1284913156"/>
+      </p:ext>
+    </p:extLst>
   </p:cSld>
   <p:clrMapOvr>
     <a:masterClrMapping/>
@@ -6166,6 +6096,357 @@
       <p:bgPr>
         <a:blipFill dpi="0" rotWithShape="1">
           <a:blip r:embed="rId2">
+            <a:lum/>
+          </a:blip>
+          <a:srcRect/>
+          <a:stretch>
+            <a:fillRect t="-17000" b="-17000"/>
+          </a:stretch>
+        </a:blipFill>
+        <a:effectLst/>
+      </p:bgPr>
+    </p:bg>
+    <p:spTree>
+      <p:nvGrpSpPr>
+        <p:cNvPr id="1" name=""/>
+        <p:cNvGrpSpPr/>
+        <p:nvPr/>
+      </p:nvGrpSpPr>
+      <p:grpSpPr>
+        <a:xfrm>
+          <a:off x="0" y="0"/>
+          <a:ext cx="0" cy="0"/>
+          <a:chOff x="0" y="0"/>
+          <a:chExt cx="0" cy="0"/>
+        </a:xfrm>
+      </p:grpSpPr>
+      <p:sp>
+        <p:nvSpPr>
+          <p:cNvPr id="2" name="Title 1"/>
+          <p:cNvSpPr>
+            <a:spLocks noGrp="1"/>
+          </p:cNvSpPr>
+          <p:nvPr>
+            <p:ph type="title"/>
+          </p:nvPr>
+        </p:nvSpPr>
+        <p:spPr/>
+        <p:txBody>
+          <a:bodyPr/>
+          <a:lstStyle/>
+          <a:p>
+            <a:r>
+              <a:t>Przykład asynchroniczny</a:t>
+            </a:r>
+          </a:p>
+        </p:txBody>
+      </p:sp>
+      <p:pic>
+        <p:nvPicPr>
+          <p:cNvPr id="5" name="Symbol zastępczy zawartości 4">
+            <a:extLst>
+              <a:ext uri="{FF2B5EF4-FFF2-40B4-BE49-F238E27FC236}">
+                <a16:creationId xmlns:a16="http://schemas.microsoft.com/office/drawing/2014/main" id="{F3008893-4A2B-23AD-9307-194D9AD0197B}"/>
+              </a:ext>
+            </a:extLst>
+          </p:cNvPr>
+          <p:cNvPicPr>
+            <a:picLocks noGrp="1" noChangeAspect="1"/>
+          </p:cNvPicPr>
+          <p:nvPr>
+            <p:ph idx="1"/>
+          </p:nvPr>
+        </p:nvPicPr>
+        <p:blipFill>
+          <a:blip r:embed="rId3"/>
+          <a:stretch>
+            <a:fillRect/>
+          </a:stretch>
+        </p:blipFill>
+        <p:spPr>
+          <a:xfrm>
+            <a:off x="1315309" y="2120900"/>
+            <a:ext cx="6513382" cy="4051300"/>
+          </a:xfrm>
+          <a:prstGeom prst="rect">
+            <a:avLst/>
+          </a:prstGeom>
+        </p:spPr>
+      </p:pic>
+    </p:spTree>
+  </p:cSld>
+  <p:clrMapOvr>
+    <a:masterClrMapping/>
+  </p:clrMapOvr>
+</p:sld>
+</file>
+
+<file path=ppt/slides/slide21.xml><?xml version="1.0" encoding="utf-8"?>
+<p:sld xmlns:a="http://schemas.openxmlformats.org/drawingml/2006/main" xmlns:r="http://schemas.openxmlformats.org/officeDocument/2006/relationships" xmlns:p="http://schemas.openxmlformats.org/presentationml/2006/main">
+  <p:cSld>
+    <p:bg>
+      <p:bgPr>
+        <a:blipFill dpi="0" rotWithShape="1">
+          <a:blip r:embed="rId2">
+            <a:lum/>
+          </a:blip>
+          <a:srcRect/>
+          <a:stretch>
+            <a:fillRect t="-17000" b="-17000"/>
+          </a:stretch>
+        </a:blipFill>
+        <a:effectLst/>
+      </p:bgPr>
+    </p:bg>
+    <p:spTree>
+      <p:nvGrpSpPr>
+        <p:cNvPr id="1" name=""/>
+        <p:cNvGrpSpPr/>
+        <p:nvPr/>
+      </p:nvGrpSpPr>
+      <p:grpSpPr>
+        <a:xfrm>
+          <a:off x="0" y="0"/>
+          <a:ext cx="0" cy="0"/>
+          <a:chOff x="0" y="0"/>
+          <a:chExt cx="0" cy="0"/>
+        </a:xfrm>
+      </p:grpSpPr>
+      <p:sp>
+        <p:nvSpPr>
+          <p:cNvPr id="2" name="Title 1"/>
+          <p:cNvSpPr>
+            <a:spLocks noGrp="1"/>
+          </p:cNvSpPr>
+          <p:nvPr>
+            <p:ph type="title"/>
+          </p:nvPr>
+        </p:nvSpPr>
+        <p:spPr/>
+        <p:txBody>
+          <a:bodyPr/>
+          <a:lstStyle/>
+          <a:p>
+            <a:r>
+              <a:t>Podsumowanie</a:t>
+            </a:r>
+          </a:p>
+        </p:txBody>
+      </p:sp>
+      <p:sp>
+        <p:nvSpPr>
+          <p:cNvPr id="3" name="Content Placeholder 2"/>
+          <p:cNvSpPr>
+            <a:spLocks noGrp="1"/>
+          </p:cNvSpPr>
+          <p:nvPr>
+            <p:ph idx="1"/>
+          </p:nvPr>
+        </p:nvSpPr>
+        <p:spPr/>
+        <p:txBody>
+          <a:bodyPr/>
+          <a:lstStyle/>
+          <a:p>
+            <a:endParaRPr dirty="0"/>
+          </a:p>
+          <a:p>
+            <a:pPr>
+              <a:defRPr sz="2000"/>
+            </a:pPr>
+            <a:r>
+              <a:rPr dirty="0" err="1"/>
+              <a:t>Wyjątki</a:t>
+            </a:r>
+            <a:r>
+              <a:rPr dirty="0"/>
+              <a:t> w </a:t>
+            </a:r>
+            <a:r>
+              <a:rPr dirty="0" err="1"/>
+              <a:t>Pythonie</a:t>
+            </a:r>
+            <a:r>
+              <a:rPr dirty="0"/>
+              <a:t> </a:t>
+            </a:r>
+            <a:r>
+              <a:rPr dirty="0" err="1"/>
+              <a:t>są</a:t>
+            </a:r>
+            <a:r>
+              <a:rPr dirty="0"/>
+              <a:t> </a:t>
+            </a:r>
+            <a:r>
+              <a:rPr dirty="0" err="1"/>
+              <a:t>elastyczne</a:t>
+            </a:r>
+            <a:r>
+              <a:rPr dirty="0"/>
+              <a:t>, ale </a:t>
+            </a:r>
+            <a:r>
+              <a:rPr dirty="0" err="1"/>
+              <a:t>mniej</a:t>
+            </a:r>
+            <a:r>
+              <a:rPr dirty="0"/>
+              <a:t> </a:t>
+            </a:r>
+            <a:r>
+              <a:rPr dirty="0" err="1"/>
+              <a:t>przewidywalne</a:t>
+            </a:r>
+            <a:endParaRPr dirty="0"/>
+          </a:p>
+          <a:p>
+            <a:pPr>
+              <a:defRPr sz="2000"/>
+            </a:pPr>
+            <a:r>
+              <a:rPr dirty="0"/>
+              <a:t>ROP = </a:t>
+            </a:r>
+            <a:r>
+              <a:rPr dirty="0" err="1"/>
+              <a:t>jawna</a:t>
+            </a:r>
+            <a:r>
+              <a:rPr dirty="0"/>
+              <a:t> </a:t>
+            </a:r>
+            <a:r>
+              <a:rPr dirty="0" err="1"/>
+              <a:t>obsługa</a:t>
+            </a:r>
+            <a:r>
+              <a:rPr dirty="0"/>
+              <a:t> </a:t>
+            </a:r>
+            <a:r>
+              <a:rPr dirty="0" err="1"/>
+              <a:t>błędów</a:t>
+            </a:r>
+            <a:r>
+              <a:rPr dirty="0"/>
+              <a:t> </a:t>
+            </a:r>
+            <a:r>
+              <a:rPr dirty="0" err="1"/>
+              <a:t>przez</a:t>
+            </a:r>
+            <a:r>
+              <a:rPr dirty="0"/>
+              <a:t> </a:t>
+            </a:r>
+            <a:r>
+              <a:rPr dirty="0" err="1"/>
+              <a:t>typy</a:t>
+            </a:r>
+            <a:r>
+              <a:rPr dirty="0"/>
+              <a:t> </a:t>
+            </a:r>
+            <a:r>
+              <a:rPr dirty="0" err="1"/>
+              <a:t>wynikowe</a:t>
+            </a:r>
+            <a:endParaRPr dirty="0"/>
+          </a:p>
+          <a:p>
+            <a:pPr>
+              <a:defRPr sz="2000"/>
+            </a:pPr>
+            <a:r>
+              <a:rPr dirty="0" err="1"/>
+              <a:t>Biblioteka</a:t>
+            </a:r>
+            <a:r>
+              <a:rPr dirty="0"/>
+              <a:t> returns </a:t>
+            </a:r>
+            <a:r>
+              <a:rPr dirty="0" err="1"/>
+              <a:t>implementuje</a:t>
+            </a:r>
+            <a:r>
+              <a:rPr dirty="0"/>
+              <a:t> </a:t>
+            </a:r>
+            <a:r>
+              <a:rPr dirty="0" err="1"/>
+              <a:t>monady</a:t>
+            </a:r>
+            <a:r>
+              <a:rPr dirty="0"/>
+              <a:t> </a:t>
+            </a:r>
+            <a:r>
+              <a:rPr dirty="0" err="1"/>
+              <a:t>funkcyjne</a:t>
+            </a:r>
+            <a:endParaRPr dirty="0"/>
+          </a:p>
+          <a:p>
+            <a:pPr>
+              <a:defRPr sz="2000"/>
+            </a:pPr>
+            <a:r>
+              <a:rPr dirty="0" err="1"/>
+              <a:t>Czytelny</a:t>
+            </a:r>
+            <a:r>
+              <a:rPr dirty="0"/>
+              <a:t> </a:t>
+            </a:r>
+            <a:r>
+              <a:rPr dirty="0" err="1"/>
+              <a:t>i</a:t>
+            </a:r>
+            <a:r>
+              <a:rPr dirty="0"/>
+              <a:t> </a:t>
+            </a:r>
+            <a:r>
+              <a:rPr dirty="0" err="1"/>
+              <a:t>skalowalny</a:t>
+            </a:r>
+            <a:r>
+              <a:rPr dirty="0"/>
+              <a:t> </a:t>
+            </a:r>
+            <a:r>
+              <a:rPr dirty="0" err="1"/>
+              <a:t>kod</a:t>
+            </a:r>
+            <a:r>
+              <a:rPr dirty="0"/>
+              <a:t> </a:t>
+            </a:r>
+            <a:r>
+              <a:rPr dirty="0" err="1"/>
+              <a:t>biznesowy</a:t>
+            </a:r>
+            <a:endParaRPr dirty="0"/>
+          </a:p>
+        </p:txBody>
+      </p:sp>
+    </p:spTree>
+  </p:cSld>
+  <p:clrMapOvr>
+    <a:masterClrMapping/>
+  </p:clrMapOvr>
+</p:sld>
+</file>
+
+<file path=ppt/slides/slide22.xml><?xml version="1.0" encoding="utf-8"?>
+<p:sld xmlns:a="http://schemas.openxmlformats.org/drawingml/2006/main" xmlns:r="http://schemas.openxmlformats.org/officeDocument/2006/relationships" xmlns:p="http://schemas.openxmlformats.org/presentationml/2006/main">
+  <p:cSld>
+    <p:bg>
+      <p:bgPr>
+        <a:blipFill dpi="0" rotWithShape="1">
+          <a:blip r:embed="rId2">
             <a:alphaModFix amt="53000"/>
             <a:lum/>
           </a:blip>
@@ -6267,7 +6548,7 @@
 </p:sld>
 </file>
 
-<file path=ppt/slides/slide21.xml><?xml version="1.0" encoding="utf-8"?>
+<file path=ppt/slides/slide23.xml><?xml version="1.0" encoding="utf-8"?>
 <p:sld xmlns:a="http://schemas.openxmlformats.org/drawingml/2006/main" xmlns:r="http://schemas.openxmlformats.org/officeDocument/2006/relationships" xmlns:p="http://schemas.openxmlformats.org/presentationml/2006/main">
   <p:cSld>
     <p:spTree>
@@ -6357,6 +6638,122 @@
               <a:buNone/>
             </a:pPr>
             <a:endParaRPr lang="pl-PL" sz="4800" dirty="0"/>
+          </a:p>
+        </p:txBody>
+      </p:sp>
+      <p:pic>
+        <p:nvPicPr>
+          <p:cNvPr id="4" name="Grafika 3">
+            <a:extLst>
+              <a:ext uri="{FF2B5EF4-FFF2-40B4-BE49-F238E27FC236}">
+                <a16:creationId xmlns:a16="http://schemas.microsoft.com/office/drawing/2014/main" id="{DDDE5A86-F4B4-688F-9AE9-02205F0FA9AA}"/>
+              </a:ext>
+            </a:extLst>
+          </p:cNvPr>
+          <p:cNvPicPr>
+            <a:picLocks noChangeAspect="1"/>
+          </p:cNvPicPr>
+          <p:nvPr/>
+        </p:nvPicPr>
+        <p:blipFill>
+          <a:blip r:embed="rId2">
+            <a:extLst>
+              <a:ext uri="{96DAC541-7B7A-43D3-8B79-37D633B846F1}">
+                <asvg:svgBlip xmlns:asvg="http://schemas.microsoft.com/office/drawing/2016/SVG/main" r:embed="rId3"/>
+              </a:ext>
+            </a:extLst>
+          </a:blip>
+          <a:stretch>
+            <a:fillRect/>
+          </a:stretch>
+        </p:blipFill>
+        <p:spPr>
+          <a:xfrm>
+            <a:off x="658813" y="4518374"/>
+            <a:ext cx="1881188" cy="1881188"/>
+          </a:xfrm>
+          <a:prstGeom prst="rect">
+            <a:avLst/>
+          </a:prstGeom>
+        </p:spPr>
+      </p:pic>
+      <p:cxnSp>
+        <p:nvCxnSpPr>
+          <p:cNvPr id="2" name="Łącznik: zakrzywiony 1">
+            <a:extLst>
+              <a:ext uri="{FF2B5EF4-FFF2-40B4-BE49-F238E27FC236}">
+                <a16:creationId xmlns:a16="http://schemas.microsoft.com/office/drawing/2014/main" id="{AB2220FC-8DDF-810D-02CD-8791DB5DC57C}"/>
+              </a:ext>
+            </a:extLst>
+          </p:cNvPr>
+          <p:cNvCxnSpPr>
+            <a:cxnSpLocks/>
+          </p:cNvCxnSpPr>
+          <p:nvPr/>
+        </p:nvCxnSpPr>
+        <p:spPr>
+          <a:xfrm rot="10800000">
+            <a:off x="2679700" y="5764166"/>
+            <a:ext cx="1016000" cy="406400"/>
+          </a:xfrm>
+          <a:prstGeom prst="curvedConnector3">
+            <a:avLst/>
+          </a:prstGeom>
+          <a:ln w="57150">
+            <a:tailEnd type="triangle"/>
+          </a:ln>
+        </p:spPr>
+        <p:style>
+          <a:lnRef idx="1">
+            <a:schemeClr val="accent1"/>
+          </a:lnRef>
+          <a:fillRef idx="0">
+            <a:schemeClr val="accent1"/>
+          </a:fillRef>
+          <a:effectRef idx="0">
+            <a:schemeClr val="accent1"/>
+          </a:effectRef>
+          <a:fontRef idx="minor">
+            <a:schemeClr val="tx1"/>
+          </a:fontRef>
+        </p:style>
+      </p:cxnSp>
+      <p:sp>
+        <p:nvSpPr>
+          <p:cNvPr id="8" name="pole tekstowe 7">
+            <a:extLst>
+              <a:ext uri="{FF2B5EF4-FFF2-40B4-BE49-F238E27FC236}">
+                <a16:creationId xmlns:a16="http://schemas.microsoft.com/office/drawing/2014/main" id="{F705A63D-05D5-443D-5637-AA6EA09E7563}"/>
+              </a:ext>
+            </a:extLst>
+          </p:cNvPr>
+          <p:cNvSpPr txBox="1"/>
+          <p:nvPr/>
+        </p:nvSpPr>
+        <p:spPr>
+          <a:xfrm>
+            <a:off x="3968750" y="6089650"/>
+            <a:ext cx="2592376" cy="369332"/>
+          </a:xfrm>
+          <a:prstGeom prst="rect">
+            <a:avLst/>
+          </a:prstGeom>
+          <a:noFill/>
+        </p:spPr>
+        <p:txBody>
+          <a:bodyPr wrap="none" rtlCol="0">
+            <a:spAutoFit/>
+          </a:bodyPr>
+          <a:lstStyle/>
+          <a:p>
+            <a:r>
+              <a:rPr lang="pl-PL" dirty="0" err="1"/>
+              <a:t>Psss</a:t>
+            </a:r>
+            <a:r>
+              <a:rPr lang="pl-PL" dirty="0"/>
+              <a:t>, kod źródłowy 👌</a:t>
+            </a:r>
           </a:p>
         </p:txBody>
       </p:sp>
@@ -6455,7 +6852,9 @@
         </p:nvSpPr>
         <p:spPr/>
         <p:txBody>
-          <a:bodyPr/>
+          <a:bodyPr>
+            <a:normAutofit/>
+          </a:bodyPr>
           <a:lstStyle/>
           <a:p>
             <a:endParaRPr dirty="0"/>
@@ -6582,6 +6981,44 @@
               <a:rPr dirty="0" err="1"/>
               <a:t>błędów</a:t>
             </a:r>
+            <a:endParaRPr lang="pl-PL" dirty="0"/>
+          </a:p>
+          <a:p>
+            <a:r>
+              <a:rPr lang="pl-PL" dirty="0"/>
+              <a:t>Ukryta dokumentacja: z sygnatury funkcji nie widać, jakie błędy mogą wystąpić.</a:t>
+            </a:r>
+          </a:p>
+          <a:p>
+            <a:r>
+              <a:rPr lang="pl-PL" dirty="0"/>
+              <a:t>Możliwe błędy w stylu: połknięcie wyjątku (</a:t>
+            </a:r>
+            <a:r>
+              <a:rPr lang="pl-PL" dirty="0" err="1"/>
+              <a:t>except</a:t>
+            </a:r>
+            <a:r>
+              <a:rPr lang="pl-PL" dirty="0"/>
+              <a:t> </a:t>
+            </a:r>
+            <a:r>
+              <a:rPr lang="pl-PL" dirty="0" err="1"/>
+              <a:t>Exception</a:t>
+            </a:r>
+            <a:r>
+              <a:rPr lang="pl-PL" dirty="0"/>
+              <a:t>: pass), albo zbyt ogólne obsługiwanie błędów.</a:t>
+            </a:r>
+            <a:br>
+              <a:rPr lang="pl-PL" dirty="0"/>
+            </a:br>
+            <a:endParaRPr lang="pl-PL" dirty="0"/>
+          </a:p>
+          <a:p>
+            <a:pPr>
+              <a:defRPr sz="2000"/>
+            </a:pPr>
             <a:endParaRPr dirty="0"/>
           </a:p>
         </p:txBody>
@@ -6811,7 +7248,7 @@
             </a:r>
             <a:r>
               <a:rPr lang="pl-PL" dirty="0"/>
-              <a:t>/C</a:t>
+              <a:t>/C#</a:t>
             </a:r>
           </a:p>
           <a:p>
@@ -6819,113 +7256,40 @@
               <a:buNone/>
               <a:defRPr sz="2000"/>
             </a:pPr>
-            <a:r>
-              <a:rPr lang="pl-PL" dirty="0" err="1"/>
-              <a:t>try</a:t>
-            </a:r>
-            <a:r>
-              <a:rPr lang="pl-PL" dirty="0"/>
-              <a:t> {</a:t>
-            </a:r>
-          </a:p>
-          <a:p>
-            <a:pPr marL="0" indent="0">
-              <a:buNone/>
-              <a:defRPr sz="2000"/>
-            </a:pPr>
-            <a:r>
-              <a:rPr lang="pl-PL" dirty="0"/>
-              <a:t>    </a:t>
-            </a:r>
-            <a:r>
-              <a:rPr lang="pl-PL" dirty="0" err="1"/>
-              <a:t>int</a:t>
-            </a:r>
-            <a:r>
-              <a:rPr lang="pl-PL" dirty="0"/>
-              <a:t> </a:t>
-            </a:r>
-            <a:r>
-              <a:rPr lang="pl-PL" dirty="0" err="1"/>
-              <a:t>result</a:t>
-            </a:r>
-            <a:r>
-              <a:rPr lang="pl-PL" dirty="0"/>
-              <a:t> = </a:t>
-            </a:r>
-            <a:r>
-              <a:rPr lang="pl-PL" dirty="0" err="1"/>
-              <a:t>divide</a:t>
-            </a:r>
-            <a:r>
-              <a:rPr lang="pl-PL" dirty="0"/>
-              <a:t>(10, 0);</a:t>
-            </a:r>
-          </a:p>
-          <a:p>
-            <a:pPr marL="0" indent="0">
-              <a:buNone/>
-              <a:defRPr sz="2000"/>
-            </a:pPr>
-            <a:r>
-              <a:rPr lang="pl-PL" dirty="0"/>
-              <a:t>} </a:t>
-            </a:r>
-            <a:r>
-              <a:rPr lang="pl-PL" dirty="0" err="1"/>
-              <a:t>catch</a:t>
-            </a:r>
-            <a:r>
-              <a:rPr lang="pl-PL" dirty="0"/>
-              <a:t> (</a:t>
-            </a:r>
-            <a:r>
-              <a:rPr lang="pl-PL" dirty="0" err="1"/>
-              <a:t>ArithmeticException</a:t>
-            </a:r>
-            <a:r>
-              <a:rPr lang="pl-PL" dirty="0"/>
-              <a:t> e) {</a:t>
-            </a:r>
-          </a:p>
-          <a:p>
-            <a:pPr marL="0" indent="0">
-              <a:buNone/>
-              <a:defRPr sz="2000"/>
-            </a:pPr>
-            <a:r>
-              <a:rPr lang="pl-PL" dirty="0"/>
-              <a:t>    </a:t>
-            </a:r>
-            <a:r>
-              <a:rPr lang="pl-PL" dirty="0" err="1"/>
-              <a:t>System.out.println</a:t>
-            </a:r>
-            <a:r>
-              <a:rPr lang="pl-PL" dirty="0"/>
-              <a:t>("Error: " + </a:t>
-            </a:r>
-            <a:r>
-              <a:rPr lang="pl-PL" dirty="0" err="1"/>
-              <a:t>e.getMessage</a:t>
-            </a:r>
-            <a:r>
-              <a:rPr lang="pl-PL" dirty="0"/>
-              <a:t>());</a:t>
-            </a:r>
-          </a:p>
-          <a:p>
-            <a:pPr marL="0" indent="0">
-              <a:buNone/>
-              <a:defRPr sz="2000"/>
-            </a:pPr>
-            <a:r>
-              <a:rPr lang="pl-PL" dirty="0"/>
-              <a:t>}</a:t>
-            </a:r>
-          </a:p>
-        </p:txBody>
-      </p:sp>
+            <a:endParaRPr lang="pl-PL" dirty="0"/>
+          </a:p>
+        </p:txBody>
+      </p:sp>
+      <p:pic>
+        <p:nvPicPr>
+          <p:cNvPr id="5" name="Obraz 4">
+            <a:extLst>
+              <a:ext uri="{FF2B5EF4-FFF2-40B4-BE49-F238E27FC236}">
+                <a16:creationId xmlns:a16="http://schemas.microsoft.com/office/drawing/2014/main" id="{AB68B902-CC4F-51C1-C44B-0DF52F9F0BAA}"/>
+              </a:ext>
+            </a:extLst>
+          </p:cNvPr>
+          <p:cNvPicPr>
+            <a:picLocks noChangeAspect="1"/>
+          </p:cNvPicPr>
+          <p:nvPr/>
+        </p:nvPicPr>
+        <p:blipFill>
+          <a:blip r:embed="rId3"/>
+          <a:stretch>
+            <a:fillRect/>
+          </a:stretch>
+        </p:blipFill>
+        <p:spPr>
+          <a:xfrm>
+            <a:off x="736600" y="2667437"/>
+            <a:ext cx="7416800" cy="1966803"/>
+          </a:xfrm>
+          <a:prstGeom prst="rect">
+            <a:avLst/>
+          </a:prstGeom>
+        </p:spPr>
+      </p:pic>
     </p:spTree>
     <p:extLst>
       <p:ext uri="{BB962C8B-B14F-4D97-AF65-F5344CB8AC3E}">
@@ -6940,6 +7304,175 @@
 </file>
 
 <file path=ppt/slides/slide6.xml><?xml version="1.0" encoding="utf-8"?>
+<p:sld xmlns:a="http://schemas.openxmlformats.org/drawingml/2006/main" xmlns:r="http://schemas.openxmlformats.org/officeDocument/2006/relationships" xmlns:p="http://schemas.openxmlformats.org/presentationml/2006/main">
+  <p:cSld>
+    <p:spTree>
+      <p:nvGrpSpPr>
+        <p:cNvPr id="1" name="">
+          <a:extLst>
+            <a:ext uri="{FF2B5EF4-FFF2-40B4-BE49-F238E27FC236}">
+              <a16:creationId xmlns:a16="http://schemas.microsoft.com/office/drawing/2014/main" id="{04CD9CBC-B349-B200-2B83-42FD1DEBD37D}"/>
+            </a:ext>
+          </a:extLst>
+        </p:cNvPr>
+        <p:cNvGrpSpPr/>
+        <p:nvPr/>
+      </p:nvGrpSpPr>
+      <p:grpSpPr>
+        <a:xfrm>
+          <a:off x="0" y="0"/>
+          <a:ext cx="0" cy="0"/>
+          <a:chOff x="0" y="0"/>
+          <a:chExt cx="0" cy="0"/>
+        </a:xfrm>
+      </p:grpSpPr>
+      <p:sp>
+        <p:nvSpPr>
+          <p:cNvPr id="2" name="Title 1">
+            <a:extLst>
+              <a:ext uri="{FF2B5EF4-FFF2-40B4-BE49-F238E27FC236}">
+                <a16:creationId xmlns:a16="http://schemas.microsoft.com/office/drawing/2014/main" id="{60062A9A-374E-D241-FF1E-5540828F523B}"/>
+              </a:ext>
+            </a:extLst>
+          </p:cNvPr>
+          <p:cNvSpPr>
+            <a:spLocks noGrp="1"/>
+          </p:cNvSpPr>
+          <p:nvPr>
+            <p:ph type="title"/>
+          </p:nvPr>
+        </p:nvSpPr>
+        <p:spPr/>
+        <p:txBody>
+          <a:bodyPr/>
+          <a:lstStyle/>
+          <a:p>
+            <a:r>
+              <a:t>Porównanie z innymi językami</a:t>
+            </a:r>
+          </a:p>
+        </p:txBody>
+      </p:sp>
+      <p:sp>
+        <p:nvSpPr>
+          <p:cNvPr id="3" name="Content Placeholder 2">
+            <a:extLst>
+              <a:ext uri="{FF2B5EF4-FFF2-40B4-BE49-F238E27FC236}">
+                <a16:creationId xmlns:a16="http://schemas.microsoft.com/office/drawing/2014/main" id="{B5051940-0AEB-1AA7-06EA-C2BFB0837792}"/>
+              </a:ext>
+            </a:extLst>
+          </p:cNvPr>
+          <p:cNvSpPr>
+            <a:spLocks noGrp="1"/>
+          </p:cNvSpPr>
+          <p:nvPr>
+            <p:ph idx="1"/>
+          </p:nvPr>
+        </p:nvSpPr>
+        <p:spPr/>
+        <p:txBody>
+          <a:bodyPr/>
+          <a:lstStyle/>
+          <a:p>
+            <a:pPr>
+              <a:defRPr sz="2000"/>
+            </a:pPr>
+            <a:r>
+              <a:t>Java</a:t>
+            </a:r>
+            <a:r>
+              <a:rPr lang="pl-PL"/>
+              <a:t>/C#</a:t>
+            </a:r>
+          </a:p>
+          <a:p>
+            <a:pPr marL="0" indent="0">
+              <a:buNone/>
+              <a:defRPr sz="2000"/>
+            </a:pPr>
+            <a:endParaRPr lang="pl-PL" dirty="0"/>
+          </a:p>
+        </p:txBody>
+      </p:sp>
+      <p:pic>
+        <p:nvPicPr>
+          <p:cNvPr id="6" name="Obraz 5">
+            <a:extLst>
+              <a:ext uri="{FF2B5EF4-FFF2-40B4-BE49-F238E27FC236}">
+                <a16:creationId xmlns:a16="http://schemas.microsoft.com/office/drawing/2014/main" id="{1FA77A83-FC2C-9EEF-3CC4-8A16DBFBF1EC}"/>
+              </a:ext>
+            </a:extLst>
+          </p:cNvPr>
+          <p:cNvPicPr>
+            <a:picLocks noChangeAspect="1"/>
+          </p:cNvPicPr>
+          <p:nvPr/>
+        </p:nvPicPr>
+        <p:blipFill>
+          <a:blip r:embed="rId2"/>
+          <a:stretch>
+            <a:fillRect/>
+          </a:stretch>
+        </p:blipFill>
+        <p:spPr>
+          <a:xfrm>
+            <a:off x="685800" y="1628433"/>
+            <a:ext cx="7943850" cy="4275929"/>
+          </a:xfrm>
+          <a:prstGeom prst="rect">
+            <a:avLst/>
+          </a:prstGeom>
+        </p:spPr>
+      </p:pic>
+      <p:sp>
+        <p:nvSpPr>
+          <p:cNvPr id="8" name="pole tekstowe 7">
+            <a:extLst>
+              <a:ext uri="{FF2B5EF4-FFF2-40B4-BE49-F238E27FC236}">
+                <a16:creationId xmlns:a16="http://schemas.microsoft.com/office/drawing/2014/main" id="{62AC2322-503E-9711-CC8B-D9C65C03AF26}"/>
+              </a:ext>
+            </a:extLst>
+          </p:cNvPr>
+          <p:cNvSpPr txBox="1"/>
+          <p:nvPr/>
+        </p:nvSpPr>
+        <p:spPr>
+          <a:xfrm>
+            <a:off x="2508250" y="1794805"/>
+            <a:ext cx="5410200" cy="646331"/>
+          </a:xfrm>
+          <a:prstGeom prst="rect">
+            <a:avLst/>
+          </a:prstGeom>
+          <a:noFill/>
+        </p:spPr>
+        <p:txBody>
+          <a:bodyPr wrap="square">
+            <a:spAutoFit/>
+          </a:bodyPr>
+          <a:lstStyle/>
+          <a:p>
+            <a:r>
+              <a:rPr lang="pl-PL" sz="1200" dirty="0"/>
+              <a:t>Źródło: https://download.java.net/java/early_access/valhalla/docs/api/java.base/java/lang/Exception.html</a:t>
+            </a:r>
+          </a:p>
+        </p:txBody>
+      </p:sp>
+    </p:spTree>
+    <p:extLst>
+      <p:ext uri="{BB962C8B-B14F-4D97-AF65-F5344CB8AC3E}">
+        <p14:creationId xmlns:p14="http://schemas.microsoft.com/office/powerpoint/2010/main" val="2224506700"/>
+      </p:ext>
+    </p:extLst>
+  </p:cSld>
+  <p:clrMapOvr>
+    <a:masterClrMapping/>
+  </p:clrMapOvr>
+</p:sld>
+</file>
+
+<file path=ppt/slides/slide7.xml><?xml version="1.0" encoding="utf-8"?>
 <p:sld xmlns:a="http://schemas.openxmlformats.org/drawingml/2006/main" xmlns:r="http://schemas.openxmlformats.org/officeDocument/2006/relationships" xmlns:p="http://schemas.openxmlformats.org/presentationml/2006/main">
   <p:cSld>
     <p:bg>
@@ -7028,242 +7561,40 @@
             <a:pPr marL="0" indent="0">
               <a:buNone/>
             </a:pPr>
-            <a:r>
-              <a:rPr lang="pl-PL" dirty="0"/>
-              <a:t>import </a:t>
-            </a:r>
-            <a:r>
-              <a:rPr lang="pl-PL" dirty="0" err="1"/>
-              <a:t>scala.util</a:t>
-            </a:r>
-            <a:r>
-              <a:rPr lang="pl-PL" dirty="0"/>
-              <a:t>.{</a:t>
-            </a:r>
-            <a:r>
-              <a:rPr lang="pl-PL" dirty="0" err="1"/>
-              <a:t>Try</a:t>
-            </a:r>
-            <a:r>
-              <a:rPr lang="pl-PL" dirty="0"/>
-              <a:t>, </a:t>
-            </a:r>
-            <a:r>
-              <a:rPr lang="pl-PL" dirty="0" err="1"/>
-              <a:t>Success</a:t>
-            </a:r>
-            <a:r>
-              <a:rPr lang="pl-PL" dirty="0"/>
-              <a:t>, </a:t>
-            </a:r>
-            <a:r>
-              <a:rPr lang="pl-PL" dirty="0" err="1"/>
-              <a:t>Failure</a:t>
-            </a:r>
-            <a:r>
-              <a:rPr lang="pl-PL" dirty="0"/>
-              <a:t>}</a:t>
-            </a:r>
-          </a:p>
-          <a:p>
-            <a:pPr marL="0" indent="0">
-              <a:buNone/>
-            </a:pPr>
             <a:endParaRPr lang="pl-PL" dirty="0"/>
           </a:p>
-          <a:p>
-            <a:pPr marL="0" indent="0">
-              <a:buNone/>
-            </a:pPr>
-            <a:r>
-              <a:rPr lang="pl-PL" dirty="0"/>
-              <a:t>def </a:t>
-            </a:r>
-            <a:r>
-              <a:rPr lang="pl-PL" dirty="0" err="1"/>
-              <a:t>divide</a:t>
-            </a:r>
-            <a:r>
-              <a:rPr lang="pl-PL" dirty="0"/>
-              <a:t>(a: </a:t>
-            </a:r>
-            <a:r>
-              <a:rPr lang="pl-PL" dirty="0" err="1"/>
-              <a:t>Int</a:t>
-            </a:r>
-            <a:r>
-              <a:rPr lang="pl-PL" dirty="0"/>
-              <a:t>, b: </a:t>
-            </a:r>
-            <a:r>
-              <a:rPr lang="pl-PL" dirty="0" err="1"/>
-              <a:t>Int</a:t>
-            </a:r>
-            <a:r>
-              <a:rPr lang="pl-PL" dirty="0"/>
-              <a:t>): </a:t>
-            </a:r>
-            <a:r>
-              <a:rPr lang="pl-PL" dirty="0" err="1"/>
-              <a:t>Try</a:t>
-            </a:r>
-            <a:r>
-              <a:rPr lang="pl-PL" dirty="0"/>
-              <a:t>[</a:t>
-            </a:r>
-            <a:r>
-              <a:rPr lang="pl-PL" dirty="0" err="1"/>
-              <a:t>Int</a:t>
-            </a:r>
-            <a:r>
-              <a:rPr lang="pl-PL" dirty="0"/>
-              <a:t>] = </a:t>
-            </a:r>
-            <a:r>
-              <a:rPr lang="pl-PL" dirty="0" err="1"/>
-              <a:t>Try</a:t>
-            </a:r>
-            <a:r>
-              <a:rPr lang="pl-PL" dirty="0"/>
-              <a:t>(a / b)</a:t>
-            </a:r>
-          </a:p>
-          <a:p>
-            <a:pPr marL="0" indent="0">
-              <a:buNone/>
-            </a:pPr>
-            <a:endParaRPr lang="pl-PL" dirty="0"/>
-          </a:p>
-          <a:p>
-            <a:pPr marL="0" indent="0">
-              <a:buNone/>
-            </a:pPr>
-            <a:r>
-              <a:rPr lang="pl-PL" dirty="0" err="1"/>
-              <a:t>divide</a:t>
-            </a:r>
-            <a:r>
-              <a:rPr lang="pl-PL" dirty="0"/>
-              <a:t>(10, 0) </a:t>
-            </a:r>
-            <a:r>
-              <a:rPr lang="pl-PL" dirty="0" err="1"/>
-              <a:t>match</a:t>
-            </a:r>
-            <a:r>
-              <a:rPr lang="pl-PL" dirty="0"/>
-              <a:t> {</a:t>
-            </a:r>
-          </a:p>
-          <a:p>
-            <a:pPr marL="0" indent="0">
-              <a:buNone/>
-            </a:pPr>
-            <a:r>
-              <a:rPr lang="pl-PL" dirty="0"/>
-              <a:t>  </a:t>
-            </a:r>
-            <a:r>
-              <a:rPr lang="pl-PL" dirty="0" err="1"/>
-              <a:t>case</a:t>
-            </a:r>
-            <a:r>
-              <a:rPr lang="pl-PL" dirty="0"/>
-              <a:t> </a:t>
-            </a:r>
-            <a:r>
-              <a:rPr lang="pl-PL" dirty="0" err="1"/>
-              <a:t>Success</a:t>
-            </a:r>
-            <a:r>
-              <a:rPr lang="pl-PL" dirty="0"/>
-              <a:t>(res) =&gt; </a:t>
-            </a:r>
-            <a:r>
-              <a:rPr lang="pl-PL" dirty="0" err="1"/>
-              <a:t>println</a:t>
-            </a:r>
-            <a:r>
-              <a:rPr lang="pl-PL" dirty="0"/>
-              <a:t>(</a:t>
-            </a:r>
-            <a:r>
-              <a:rPr lang="pl-PL" dirty="0" err="1"/>
-              <a:t>s"Result</a:t>
-            </a:r>
-            <a:r>
-              <a:rPr lang="pl-PL" dirty="0"/>
-              <a:t>: $res")</a:t>
-            </a:r>
-          </a:p>
-          <a:p>
-            <a:pPr marL="0" indent="0">
-              <a:buNone/>
-            </a:pPr>
-            <a:r>
-              <a:rPr lang="pl-PL" dirty="0"/>
-              <a:t>  </a:t>
-            </a:r>
-            <a:r>
-              <a:rPr lang="pl-PL" dirty="0" err="1"/>
-              <a:t>case</a:t>
-            </a:r>
-            <a:r>
-              <a:rPr lang="pl-PL" dirty="0"/>
-              <a:t> </a:t>
-            </a:r>
-            <a:r>
-              <a:rPr lang="pl-PL" dirty="0" err="1"/>
-              <a:t>Failure</a:t>
-            </a:r>
-            <a:r>
-              <a:rPr lang="pl-PL" dirty="0"/>
-              <a:t>(</a:t>
-            </a:r>
-            <a:r>
-              <a:rPr lang="pl-PL" dirty="0" err="1"/>
-              <a:t>err</a:t>
-            </a:r>
-            <a:r>
-              <a:rPr lang="pl-PL" dirty="0"/>
-              <a:t>) =&gt; </a:t>
-            </a:r>
-            <a:r>
-              <a:rPr lang="pl-PL" dirty="0" err="1"/>
-              <a:t>println</a:t>
-            </a:r>
-            <a:r>
-              <a:rPr lang="pl-PL" dirty="0"/>
-              <a:t>(</a:t>
-            </a:r>
-            <a:r>
-              <a:rPr lang="pl-PL" dirty="0" err="1"/>
-              <a:t>s"Error</a:t>
-            </a:r>
-            <a:r>
-              <a:rPr lang="pl-PL" dirty="0"/>
-              <a:t>: ${</a:t>
-            </a:r>
-            <a:r>
-              <a:rPr lang="pl-PL" dirty="0" err="1"/>
-              <a:t>err.getMessage</a:t>
-            </a:r>
-            <a:r>
-              <a:rPr lang="pl-PL" dirty="0"/>
-              <a:t>}")</a:t>
-            </a:r>
-          </a:p>
-          <a:p>
-            <a:pPr marL="0" indent="0">
-              <a:buNone/>
-            </a:pPr>
-            <a:r>
-              <a:rPr lang="pl-PL" dirty="0"/>
-              <a:t>}</a:t>
-            </a:r>
-          </a:p>
-        </p:txBody>
-      </p:sp>
+        </p:txBody>
+      </p:sp>
+      <p:pic>
+        <p:nvPicPr>
+          <p:cNvPr id="5" name="Obraz 4">
+            <a:extLst>
+              <a:ext uri="{FF2B5EF4-FFF2-40B4-BE49-F238E27FC236}">
+                <a16:creationId xmlns:a16="http://schemas.microsoft.com/office/drawing/2014/main" id="{E005828B-F3CB-2D0A-AA55-8D0DF7F018FE}"/>
+              </a:ext>
+            </a:extLst>
+          </p:cNvPr>
+          <p:cNvPicPr>
+            <a:picLocks noChangeAspect="1"/>
+          </p:cNvPicPr>
+          <p:nvPr/>
+        </p:nvPicPr>
+        <p:blipFill>
+          <a:blip r:embed="rId3"/>
+          <a:stretch>
+            <a:fillRect/>
+          </a:stretch>
+        </p:blipFill>
+        <p:spPr>
+          <a:xfrm>
+            <a:off x="789340" y="2540509"/>
+            <a:ext cx="7476420" cy="2615182"/>
+          </a:xfrm>
+          <a:prstGeom prst="rect">
+            <a:avLst/>
+          </a:prstGeom>
+        </p:spPr>
+      </p:pic>
     </p:spTree>
     <p:extLst>
       <p:ext uri="{BB962C8B-B14F-4D97-AF65-F5344CB8AC3E}">
@@ -7277,7 +7608,7 @@
 </p:sld>
 </file>
 
-<file path=ppt/slides/slide7.xml><?xml version="1.0" encoding="utf-8"?>
+<file path=ppt/slides/slide8.xml><?xml version="1.0" encoding="utf-8"?>
 <p:sld xmlns:a="http://schemas.openxmlformats.org/drawingml/2006/main" xmlns:r="http://schemas.openxmlformats.org/officeDocument/2006/relationships" xmlns:p="http://schemas.openxmlformats.org/presentationml/2006/main">
   <p:cSld>
     <p:bg>
@@ -7378,239 +7709,63 @@
         <p:spPr/>
         <p:txBody>
           <a:bodyPr>
-            <a:normAutofit fontScale="85000" lnSpcReduction="20000"/>
+            <a:normAutofit/>
           </a:bodyPr>
           <a:lstStyle/>
-          <a:p>
-            <a:pPr>
-              <a:defRPr sz="2000"/>
-            </a:pPr>
-            <a:r>
-              <a:rPr dirty="0"/>
-              <a:t>Go</a:t>
-            </a:r>
-            <a:r>
-              <a:rPr lang="pl-PL" dirty="0"/>
-              <a:t> ➡️ Brak wyjątków, zwracanie (</a:t>
-            </a:r>
-            <a:r>
-              <a:rPr lang="pl-PL" dirty="0" err="1"/>
-              <a:t>value</a:t>
-            </a:r>
-            <a:r>
-              <a:rPr lang="pl-PL" dirty="0"/>
-              <a:t>, error) – jawne i proste.</a:t>
-            </a:r>
-          </a:p>
           <a:p>
             <a:pPr marL="0" indent="0">
               <a:buNone/>
               <a:defRPr sz="2000"/>
             </a:pPr>
             <a:r>
+              <a:rPr dirty="0"/>
+              <a:t>Go</a:t>
+            </a:r>
+            <a:r>
+              <a:rPr lang="pl-PL" dirty="0"/>
+              <a:t> ➡️ Brak wyjątków, zwracanie (</a:t>
+            </a:r>
+            <a:r>
               <a:rPr lang="pl-PL" dirty="0" err="1"/>
-              <a:t>func</a:t>
-            </a:r>
-            <a:r>
-              <a:rPr lang="pl-PL" dirty="0"/>
-              <a:t> </a:t>
-            </a:r>
-            <a:r>
-              <a:rPr lang="pl-PL" dirty="0" err="1"/>
-              <a:t>divide</a:t>
-            </a:r>
-            <a:r>
-              <a:rPr lang="pl-PL" dirty="0"/>
-              <a:t>(a, b </a:t>
-            </a:r>
-            <a:r>
-              <a:rPr lang="pl-PL" dirty="0" err="1"/>
-              <a:t>int</a:t>
-            </a:r>
-            <a:r>
-              <a:rPr lang="pl-PL" dirty="0"/>
-              <a:t>) (</a:t>
-            </a:r>
-            <a:r>
-              <a:rPr lang="pl-PL" dirty="0" err="1"/>
-              <a:t>int</a:t>
-            </a:r>
-            <a:r>
-              <a:rPr lang="pl-PL" dirty="0"/>
-              <a:t>, error) {</a:t>
-            </a:r>
-          </a:p>
-          <a:p>
-            <a:pPr marL="0" indent="0">
-              <a:buNone/>
-              <a:defRPr sz="2000"/>
-            </a:pPr>
-            <a:r>
-              <a:rPr lang="pl-PL" dirty="0"/>
-              <a:t>    </a:t>
-            </a:r>
-            <a:r>
-              <a:rPr lang="pl-PL" dirty="0" err="1"/>
-              <a:t>if</a:t>
-            </a:r>
-            <a:r>
-              <a:rPr lang="pl-PL" dirty="0"/>
-              <a:t> b == 0 {</a:t>
-            </a:r>
-          </a:p>
-          <a:p>
-            <a:pPr marL="0" indent="0">
-              <a:buNone/>
-              <a:defRPr sz="2000"/>
-            </a:pPr>
-            <a:r>
-              <a:rPr lang="pl-PL" dirty="0"/>
-              <a:t>        return 0, </a:t>
-            </a:r>
-            <a:r>
-              <a:rPr lang="pl-PL" dirty="0" err="1"/>
-              <a:t>fmt.Errorf</a:t>
-            </a:r>
-            <a:r>
-              <a:rPr lang="pl-PL" dirty="0"/>
-              <a:t>("</a:t>
-            </a:r>
-            <a:r>
-              <a:rPr lang="pl-PL" dirty="0" err="1"/>
-              <a:t>division</a:t>
-            </a:r>
-            <a:r>
-              <a:rPr lang="pl-PL" dirty="0"/>
-              <a:t> by zero")</a:t>
-            </a:r>
-          </a:p>
-          <a:p>
-            <a:pPr marL="0" indent="0">
-              <a:buNone/>
-              <a:defRPr sz="2000"/>
-            </a:pPr>
-            <a:r>
-              <a:rPr lang="pl-PL" dirty="0"/>
-              <a:t>    }</a:t>
-            </a:r>
-          </a:p>
-          <a:p>
-            <a:pPr marL="0" indent="0">
-              <a:buNone/>
-              <a:defRPr sz="2000"/>
-            </a:pPr>
-            <a:r>
-              <a:rPr lang="pl-PL" dirty="0"/>
-              <a:t>    return a / b, nil</a:t>
-            </a:r>
-          </a:p>
-          <a:p>
-            <a:pPr marL="0" indent="0">
-              <a:buNone/>
-              <a:defRPr sz="2000"/>
-            </a:pPr>
-            <a:r>
-              <a:rPr lang="pl-PL" dirty="0"/>
-              <a:t>}</a:t>
-            </a:r>
-          </a:p>
-          <a:p>
-            <a:pPr marL="0" indent="0">
-              <a:buNone/>
-              <a:defRPr sz="2000"/>
-            </a:pPr>
-            <a:endParaRPr lang="pl-PL" dirty="0"/>
-          </a:p>
-          <a:p>
-            <a:pPr marL="0" indent="0">
-              <a:buNone/>
-              <a:defRPr sz="2000"/>
-            </a:pPr>
-            <a:r>
-              <a:rPr lang="pl-PL" dirty="0" err="1"/>
-              <a:t>result</a:t>
-            </a:r>
-            <a:r>
-              <a:rPr lang="pl-PL" dirty="0"/>
-              <a:t>, </a:t>
-            </a:r>
-            <a:r>
-              <a:rPr lang="pl-PL" dirty="0" err="1"/>
-              <a:t>err</a:t>
-            </a:r>
-            <a:r>
-              <a:rPr lang="pl-PL" dirty="0"/>
-              <a:t> := </a:t>
-            </a:r>
-            <a:r>
-              <a:rPr lang="pl-PL" dirty="0" err="1"/>
-              <a:t>divide</a:t>
-            </a:r>
-            <a:r>
-              <a:rPr lang="pl-PL" dirty="0"/>
-              <a:t>(10, 0)</a:t>
-            </a:r>
-          </a:p>
-          <a:p>
-            <a:pPr marL="0" indent="0">
-              <a:buNone/>
-              <a:defRPr sz="2000"/>
-            </a:pPr>
-            <a:r>
-              <a:rPr lang="pl-PL" dirty="0" err="1"/>
-              <a:t>if</a:t>
-            </a:r>
-            <a:r>
-              <a:rPr lang="pl-PL" dirty="0"/>
-              <a:t> </a:t>
-            </a:r>
-            <a:r>
-              <a:rPr lang="pl-PL" dirty="0" err="1"/>
-              <a:t>err</a:t>
-            </a:r>
-            <a:r>
-              <a:rPr lang="pl-PL" dirty="0"/>
-              <a:t> != nil {</a:t>
-            </a:r>
-          </a:p>
-          <a:p>
-            <a:pPr marL="0" indent="0">
-              <a:buNone/>
-              <a:defRPr sz="2000"/>
-            </a:pPr>
-            <a:r>
-              <a:rPr lang="pl-PL" dirty="0"/>
-              <a:t>    </a:t>
-            </a:r>
-            <a:r>
-              <a:rPr lang="pl-PL" dirty="0" err="1"/>
-              <a:t>fmt.Println</a:t>
-            </a:r>
-            <a:r>
-              <a:rPr lang="pl-PL" dirty="0"/>
-              <a:t>("Error:", </a:t>
-            </a:r>
-            <a:r>
-              <a:rPr lang="pl-PL" dirty="0" err="1"/>
-              <a:t>err</a:t>
-            </a:r>
-            <a:r>
-              <a:rPr lang="pl-PL" dirty="0"/>
-              <a:t>)</a:t>
-            </a:r>
-          </a:p>
-          <a:p>
-            <a:pPr marL="0" indent="0">
-              <a:buNone/>
-              <a:defRPr sz="2000"/>
-            </a:pPr>
-            <a:r>
-              <a:rPr lang="pl-PL" dirty="0"/>
-              <a:t>}</a:t>
-            </a:r>
-          </a:p>
-        </p:txBody>
-      </p:sp>
+              <a:t>value</a:t>
+            </a:r>
+            <a:r>
+              <a:rPr lang="pl-PL" dirty="0"/>
+              <a:t>, error) – jawne i proste.</a:t>
+            </a:r>
+          </a:p>
+        </p:txBody>
+      </p:sp>
+      <p:pic>
+        <p:nvPicPr>
+          <p:cNvPr id="5" name="Obraz 4">
+            <a:extLst>
+              <a:ext uri="{FF2B5EF4-FFF2-40B4-BE49-F238E27FC236}">
+                <a16:creationId xmlns:a16="http://schemas.microsoft.com/office/drawing/2014/main" id="{0CEF3351-8539-A25F-ED83-0C9B0C939D69}"/>
+              </a:ext>
+            </a:extLst>
+          </p:cNvPr>
+          <p:cNvPicPr>
+            <a:picLocks noChangeAspect="1"/>
+          </p:cNvPicPr>
+          <p:nvPr/>
+        </p:nvPicPr>
+        <p:blipFill>
+          <a:blip r:embed="rId3"/>
+          <a:stretch>
+            <a:fillRect/>
+          </a:stretch>
+        </p:blipFill>
+        <p:spPr>
+          <a:xfrm>
+            <a:off x="730250" y="2632471"/>
+            <a:ext cx="7289800" cy="3256758"/>
+          </a:xfrm>
+          <a:prstGeom prst="rect">
+            <a:avLst/>
+          </a:prstGeom>
+        </p:spPr>
+      </p:pic>
     </p:spTree>
     <p:extLst>
       <p:ext uri="{BB962C8B-B14F-4D97-AF65-F5344CB8AC3E}">
@@ -7624,7 +7779,7 @@
 </p:sld>
 </file>
 
-<file path=ppt/slides/slide8.xml><?xml version="1.0" encoding="utf-8"?>
+<file path=ppt/slides/slide9.xml><?xml version="1.0" encoding="utf-8"?>
 <p:sld xmlns:a="http://schemas.openxmlformats.org/drawingml/2006/main" xmlns:r="http://schemas.openxmlformats.org/officeDocument/2006/relationships" xmlns:p="http://schemas.openxmlformats.org/presentationml/2006/main">
   <p:cSld>
     <p:bg>
@@ -7707,7 +7862,7 @@
         <p:spPr/>
         <p:txBody>
           <a:bodyPr>
-            <a:normAutofit fontScale="55000" lnSpcReduction="20000"/>
+            <a:normAutofit/>
           </a:bodyPr>
           <a:lstStyle/>
           <a:p>
@@ -7735,529 +7890,44 @@
             <a:pPr marL="0" indent="0">
               <a:buNone/>
             </a:pPr>
-            <a:r>
-              <a:rPr lang="pl-PL" dirty="0" err="1"/>
-              <a:t>fn</a:t>
-            </a:r>
-            <a:r>
-              <a:rPr lang="pl-PL" dirty="0"/>
-              <a:t> </a:t>
-            </a:r>
-            <a:r>
-              <a:rPr lang="pl-PL" dirty="0" err="1"/>
-              <a:t>divide</a:t>
-            </a:r>
-            <a:r>
-              <a:rPr lang="pl-PL" dirty="0"/>
-              <a:t>(a: i32, b: i32) -&gt; </a:t>
-            </a:r>
-            <a:r>
-              <a:rPr lang="pl-PL" dirty="0" err="1"/>
-              <a:t>Result</a:t>
-            </a:r>
-            <a:r>
-              <a:rPr lang="pl-PL" dirty="0"/>
-              <a:t>&lt;i32, String&gt; {</a:t>
-            </a:r>
-          </a:p>
-          <a:p>
-            <a:pPr marL="0" indent="0">
-              <a:buNone/>
-            </a:pPr>
-            <a:r>
-              <a:rPr lang="pl-PL" dirty="0"/>
-              <a:t>    </a:t>
-            </a:r>
-            <a:r>
-              <a:rPr lang="pl-PL" dirty="0" err="1"/>
-              <a:t>if</a:t>
-            </a:r>
-            <a:r>
-              <a:rPr lang="pl-PL" dirty="0"/>
-              <a:t> b == 0 {</a:t>
-            </a:r>
-          </a:p>
-          <a:p>
-            <a:pPr marL="0" indent="0">
-              <a:buNone/>
-            </a:pPr>
-            <a:r>
-              <a:rPr lang="pl-PL" dirty="0"/>
-              <a:t>        </a:t>
-            </a:r>
-            <a:r>
-              <a:rPr lang="pl-PL" dirty="0" err="1"/>
-              <a:t>Err</a:t>
-            </a:r>
-            <a:r>
-              <a:rPr lang="pl-PL" dirty="0"/>
-              <a:t>("</a:t>
-            </a:r>
-            <a:r>
-              <a:rPr lang="pl-PL" dirty="0" err="1"/>
-              <a:t>division</a:t>
-            </a:r>
-            <a:r>
-              <a:rPr lang="pl-PL" dirty="0"/>
-              <a:t> by zero".</a:t>
-            </a:r>
-            <a:r>
-              <a:rPr lang="pl-PL" dirty="0" err="1"/>
-              <a:t>to_string</a:t>
-            </a:r>
-            <a:r>
-              <a:rPr lang="pl-PL" dirty="0"/>
-              <a:t>())</a:t>
-            </a:r>
-          </a:p>
-          <a:p>
-            <a:pPr marL="0" indent="0">
-              <a:buNone/>
-            </a:pPr>
-            <a:r>
-              <a:rPr lang="pl-PL" dirty="0"/>
-              <a:t>    } </a:t>
-            </a:r>
-            <a:r>
-              <a:rPr lang="pl-PL" dirty="0" err="1"/>
-              <a:t>else</a:t>
-            </a:r>
-            <a:r>
-              <a:rPr lang="pl-PL" dirty="0"/>
-              <a:t> {</a:t>
-            </a:r>
-          </a:p>
-          <a:p>
-            <a:pPr marL="0" indent="0">
-              <a:buNone/>
-            </a:pPr>
-            <a:r>
-              <a:rPr lang="pl-PL" dirty="0"/>
-              <a:t>        Ok(a / b)</a:t>
-            </a:r>
-          </a:p>
-          <a:p>
-            <a:pPr marL="0" indent="0">
-              <a:buNone/>
-            </a:pPr>
-            <a:r>
-              <a:rPr lang="pl-PL" dirty="0"/>
-              <a:t>    }</a:t>
-            </a:r>
-          </a:p>
-          <a:p>
-            <a:pPr marL="0" indent="0">
-              <a:buNone/>
-            </a:pPr>
-            <a:r>
-              <a:rPr lang="pl-PL" dirty="0"/>
-              <a:t>}</a:t>
-            </a:r>
-          </a:p>
-          <a:p>
-            <a:pPr marL="0" indent="0">
-              <a:buNone/>
-            </a:pPr>
-            <a:br>
-              <a:rPr lang="pl-PL" dirty="0"/>
-            </a:br>
-            <a:r>
-              <a:rPr lang="pl-PL" dirty="0" err="1"/>
-              <a:t>fn</a:t>
-            </a:r>
-            <a:r>
-              <a:rPr lang="pl-PL" dirty="0"/>
-              <a:t> </a:t>
-            </a:r>
-            <a:r>
-              <a:rPr lang="pl-PL" dirty="0" err="1"/>
-              <a:t>main</a:t>
-            </a:r>
-            <a:r>
-              <a:rPr lang="pl-PL" dirty="0"/>
-              <a:t>() {</a:t>
-            </a:r>
-          </a:p>
-          <a:p>
-            <a:pPr marL="0" indent="0">
-              <a:buNone/>
-            </a:pPr>
-            <a:r>
-              <a:rPr lang="pl-PL" dirty="0"/>
-              <a:t>    </a:t>
-            </a:r>
-            <a:r>
-              <a:rPr lang="pl-PL" dirty="0" err="1"/>
-              <a:t>match</a:t>
-            </a:r>
-            <a:r>
-              <a:rPr lang="pl-PL" dirty="0"/>
-              <a:t> </a:t>
-            </a:r>
-            <a:r>
-              <a:rPr lang="pl-PL" dirty="0" err="1"/>
-              <a:t>divide</a:t>
-            </a:r>
-            <a:r>
-              <a:rPr lang="pl-PL" dirty="0"/>
-              <a:t>(10, 0) {</a:t>
-            </a:r>
-          </a:p>
-          <a:p>
-            <a:pPr marL="0" indent="0">
-              <a:buNone/>
-            </a:pPr>
-            <a:r>
-              <a:rPr lang="pl-PL" dirty="0"/>
-              <a:t>        Ok(res) =&gt; </a:t>
-            </a:r>
-            <a:r>
-              <a:rPr lang="pl-PL" dirty="0" err="1"/>
-              <a:t>println</a:t>
-            </a:r>
-            <a:r>
-              <a:rPr lang="pl-PL" dirty="0"/>
-              <a:t>!("</a:t>
-            </a:r>
-            <a:r>
-              <a:rPr lang="pl-PL" dirty="0" err="1"/>
-              <a:t>Result</a:t>
-            </a:r>
-            <a:r>
-              <a:rPr lang="pl-PL" dirty="0"/>
-              <a:t>: {}", res),</a:t>
-            </a:r>
-          </a:p>
-          <a:p>
-            <a:pPr marL="0" indent="0">
-              <a:buNone/>
-            </a:pPr>
-            <a:r>
-              <a:rPr lang="pl-PL" dirty="0"/>
-              <a:t>        </a:t>
-            </a:r>
-            <a:r>
-              <a:rPr lang="pl-PL" dirty="0" err="1"/>
-              <a:t>Err</a:t>
-            </a:r>
-            <a:r>
-              <a:rPr lang="pl-PL" dirty="0"/>
-              <a:t>(e) =&gt; </a:t>
-            </a:r>
-            <a:r>
-              <a:rPr lang="pl-PL" dirty="0" err="1"/>
-              <a:t>println</a:t>
-            </a:r>
-            <a:r>
-              <a:rPr lang="pl-PL" dirty="0"/>
-              <a:t>!("Error: {}", e),</a:t>
-            </a:r>
-          </a:p>
-          <a:p>
-            <a:pPr marL="0" indent="0">
-              <a:buNone/>
-            </a:pPr>
-            <a:r>
-              <a:rPr lang="pl-PL" dirty="0"/>
-              <a:t>    }</a:t>
-            </a:r>
-          </a:p>
-          <a:p>
-            <a:pPr marL="0" indent="0">
-              <a:buNone/>
-            </a:pPr>
-            <a:r>
-              <a:rPr lang="pl-PL" dirty="0"/>
-              <a:t>}</a:t>
-            </a:r>
-          </a:p>
-        </p:txBody>
-      </p:sp>
+            <a:endParaRPr lang="pl-PL" dirty="0"/>
+          </a:p>
+        </p:txBody>
+      </p:sp>
+      <p:pic>
+        <p:nvPicPr>
+          <p:cNvPr id="5" name="Obraz 4">
+            <a:extLst>
+              <a:ext uri="{FF2B5EF4-FFF2-40B4-BE49-F238E27FC236}">
+                <a16:creationId xmlns:a16="http://schemas.microsoft.com/office/drawing/2014/main" id="{1B51C72A-33C5-01B0-38D9-56901DBCF5E1}"/>
+              </a:ext>
+            </a:extLst>
+          </p:cNvPr>
+          <p:cNvPicPr>
+            <a:picLocks noChangeAspect="1"/>
+          </p:cNvPicPr>
+          <p:nvPr/>
+        </p:nvPicPr>
+        <p:blipFill>
+          <a:blip r:embed="rId3"/>
+          <a:stretch>
+            <a:fillRect/>
+          </a:stretch>
+        </p:blipFill>
+        <p:spPr>
+          <a:xfrm>
+            <a:off x="811351" y="2520950"/>
+            <a:ext cx="6459400" cy="3800318"/>
+          </a:xfrm>
+          <a:prstGeom prst="rect">
+            <a:avLst/>
+          </a:prstGeom>
+        </p:spPr>
+      </p:pic>
     </p:spTree>
     <p:extLst>
       <p:ext uri="{BB962C8B-B14F-4D97-AF65-F5344CB8AC3E}">
         <p14:creationId xmlns:p14="http://schemas.microsoft.com/office/powerpoint/2010/main" val="1244465905"/>
-      </p:ext>
-    </p:extLst>
-  </p:cSld>
-  <p:clrMapOvr>
-    <a:masterClrMapping/>
-  </p:clrMapOvr>
-</p:sld>
-</file>
-
-<file path=ppt/slides/slide9.xml><?xml version="1.0" encoding="utf-8"?>
-<p:sld xmlns:a="http://schemas.openxmlformats.org/drawingml/2006/main" xmlns:r="http://schemas.openxmlformats.org/officeDocument/2006/relationships" xmlns:p="http://schemas.openxmlformats.org/presentationml/2006/main">
-  <p:cSld>
-    <p:bg>
-      <p:bgPr>
-        <a:blipFill dpi="0" rotWithShape="1">
-          <a:blip r:embed="rId2">
-            <a:lum/>
-          </a:blip>
-          <a:srcRect/>
-          <a:stretch>
-            <a:fillRect t="-17000" b="-17000"/>
-          </a:stretch>
-        </a:blipFill>
-        <a:effectLst/>
-      </p:bgPr>
-    </p:bg>
-    <p:spTree>
-      <p:nvGrpSpPr>
-        <p:cNvPr id="1" name="">
-          <a:extLst>
-            <a:ext uri="{FF2B5EF4-FFF2-40B4-BE49-F238E27FC236}">
-              <a16:creationId xmlns:a16="http://schemas.microsoft.com/office/drawing/2014/main" id="{26E0047A-6714-9835-E34F-01470907A69E}"/>
-            </a:ext>
-          </a:extLst>
-        </p:cNvPr>
-        <p:cNvGrpSpPr/>
-        <p:nvPr/>
-      </p:nvGrpSpPr>
-      <p:grpSpPr>
-        <a:xfrm>
-          <a:off x="0" y="0"/>
-          <a:ext cx="0" cy="0"/>
-          <a:chOff x="0" y="0"/>
-          <a:chExt cx="0" cy="0"/>
-        </a:xfrm>
-      </p:grpSpPr>
-      <p:sp>
-        <p:nvSpPr>
-          <p:cNvPr id="2" name="Title 1">
-            <a:extLst>
-              <a:ext uri="{FF2B5EF4-FFF2-40B4-BE49-F238E27FC236}">
-                <a16:creationId xmlns:a16="http://schemas.microsoft.com/office/drawing/2014/main" id="{D70BD27B-59C2-39A6-D7F4-AAC7187CD9CE}"/>
-              </a:ext>
-            </a:extLst>
-          </p:cNvPr>
-          <p:cNvSpPr>
-            <a:spLocks noGrp="1"/>
-          </p:cNvSpPr>
-          <p:nvPr>
-            <p:ph type="title"/>
-          </p:nvPr>
-        </p:nvSpPr>
-        <p:spPr/>
-        <p:txBody>
-          <a:bodyPr/>
-          <a:lstStyle/>
-          <a:p>
-            <a:r>
-              <a:t>Porównanie z innymi językami</a:t>
-            </a:r>
-          </a:p>
-        </p:txBody>
-      </p:sp>
-      <p:sp>
-        <p:nvSpPr>
-          <p:cNvPr id="3" name="Content Placeholder 2">
-            <a:extLst>
-              <a:ext uri="{FF2B5EF4-FFF2-40B4-BE49-F238E27FC236}">
-                <a16:creationId xmlns:a16="http://schemas.microsoft.com/office/drawing/2014/main" id="{FF5DFD3A-4571-457C-F4CC-1B30338338FF}"/>
-              </a:ext>
-            </a:extLst>
-          </p:cNvPr>
-          <p:cNvSpPr>
-            <a:spLocks noGrp="1"/>
-          </p:cNvSpPr>
-          <p:nvPr>
-            <p:ph idx="1"/>
-          </p:nvPr>
-        </p:nvSpPr>
-        <p:spPr/>
-        <p:txBody>
-          <a:bodyPr/>
-          <a:lstStyle/>
-          <a:p>
-            <a:pPr>
-              <a:defRPr sz="2000"/>
-            </a:pPr>
-            <a:r>
-              <a:rPr lang="pl-PL" dirty="0"/>
-              <a:t>Erlang ➡️ </a:t>
-            </a:r>
-            <a:r>
-              <a:rPr lang="pl-PL" dirty="0" err="1"/>
-              <a:t>Krotki</a:t>
-            </a:r>
-            <a:r>
-              <a:rPr lang="pl-PL" dirty="0"/>
-              <a:t> {ok, Val} | {error, </a:t>
-            </a:r>
-            <a:r>
-              <a:rPr lang="pl-PL" dirty="0" err="1"/>
-              <a:t>Reason</a:t>
-            </a:r>
-            <a:r>
-              <a:rPr lang="pl-PL" dirty="0"/>
-              <a:t>}, brak klasycznych wyjątków.</a:t>
-            </a:r>
-          </a:p>
-          <a:p>
-            <a:pPr marL="0" indent="0">
-              <a:buNone/>
-            </a:pPr>
-            <a:r>
-              <a:rPr lang="pl-PL" dirty="0" err="1"/>
-              <a:t>divide</a:t>
-            </a:r>
-            <a:r>
-              <a:rPr lang="pl-PL" dirty="0"/>
-              <a:t>(A, 0) -&gt; {error, </a:t>
-            </a:r>
-            <a:r>
-              <a:rPr lang="pl-PL" dirty="0" err="1"/>
-              <a:t>division_by_zero</a:t>
-            </a:r>
-            <a:r>
-              <a:rPr lang="pl-PL" dirty="0"/>
-              <a:t>};</a:t>
-            </a:r>
-          </a:p>
-          <a:p>
-            <a:pPr marL="0" indent="0">
-              <a:buNone/>
-            </a:pPr>
-            <a:r>
-              <a:rPr lang="pl-PL" dirty="0" err="1"/>
-              <a:t>divide</a:t>
-            </a:r>
-            <a:r>
-              <a:rPr lang="pl-PL" dirty="0"/>
-              <a:t>(A, B) -&gt; {ok, A div B}.</a:t>
-            </a:r>
-          </a:p>
-          <a:p>
-            <a:pPr marL="0" indent="0">
-              <a:buNone/>
-            </a:pPr>
-            <a:br>
-              <a:rPr lang="pl-PL" dirty="0"/>
-            </a:br>
-            <a:r>
-              <a:rPr lang="pl-PL" dirty="0" err="1"/>
-              <a:t>case</a:t>
-            </a:r>
-            <a:r>
-              <a:rPr lang="pl-PL" dirty="0"/>
-              <a:t> </a:t>
-            </a:r>
-            <a:r>
-              <a:rPr lang="pl-PL" dirty="0" err="1"/>
-              <a:t>divide</a:t>
-            </a:r>
-            <a:r>
-              <a:rPr lang="pl-PL" dirty="0"/>
-              <a:t>(10, 0) of</a:t>
-            </a:r>
-          </a:p>
-          <a:p>
-            <a:pPr marL="0" indent="0">
-              <a:buNone/>
-            </a:pPr>
-            <a:r>
-              <a:rPr lang="pl-PL" dirty="0"/>
-              <a:t>    {ok, </a:t>
-            </a:r>
-            <a:r>
-              <a:rPr lang="pl-PL" dirty="0" err="1"/>
-              <a:t>Result</a:t>
-            </a:r>
-            <a:r>
-              <a:rPr lang="pl-PL" dirty="0"/>
-              <a:t>} -&gt; </a:t>
-            </a:r>
-            <a:r>
-              <a:rPr lang="pl-PL" dirty="0" err="1"/>
-              <a:t>io:format</a:t>
-            </a:r>
-            <a:r>
-              <a:rPr lang="pl-PL" dirty="0"/>
-              <a:t>("</a:t>
-            </a:r>
-            <a:r>
-              <a:rPr lang="pl-PL" dirty="0" err="1"/>
-              <a:t>Result</a:t>
-            </a:r>
-            <a:r>
-              <a:rPr lang="pl-PL" dirty="0"/>
-              <a:t>: ~</a:t>
-            </a:r>
-            <a:r>
-              <a:rPr lang="pl-PL" dirty="0" err="1"/>
-              <a:t>p~n</a:t>
-            </a:r>
-            <a:r>
-              <a:rPr lang="pl-PL" dirty="0"/>
-              <a:t>", [</a:t>
-            </a:r>
-            <a:r>
-              <a:rPr lang="pl-PL" dirty="0" err="1"/>
-              <a:t>Result</a:t>
-            </a:r>
-            <a:r>
-              <a:rPr lang="pl-PL" dirty="0"/>
-              <a:t>]);</a:t>
-            </a:r>
-          </a:p>
-          <a:p>
-            <a:pPr marL="0" indent="0">
-              <a:buNone/>
-            </a:pPr>
-            <a:r>
-              <a:rPr lang="pl-PL" dirty="0"/>
-              <a:t>    {error, </a:t>
-            </a:r>
-            <a:r>
-              <a:rPr lang="pl-PL" dirty="0" err="1"/>
-              <a:t>Reason</a:t>
-            </a:r>
-            <a:r>
-              <a:rPr lang="pl-PL" dirty="0"/>
-              <a:t>} -&gt; </a:t>
-            </a:r>
-            <a:r>
-              <a:rPr lang="pl-PL" dirty="0" err="1"/>
-              <a:t>io:format</a:t>
-            </a:r>
-            <a:r>
-              <a:rPr lang="pl-PL" dirty="0"/>
-              <a:t>("Error: ~</a:t>
-            </a:r>
-            <a:r>
-              <a:rPr lang="pl-PL" dirty="0" err="1"/>
-              <a:t>p~n</a:t>
-            </a:r>
-            <a:r>
-              <a:rPr lang="pl-PL" dirty="0"/>
-              <a:t>", [</a:t>
-            </a:r>
-            <a:r>
-              <a:rPr lang="pl-PL" dirty="0" err="1"/>
-              <a:t>Reason</a:t>
-            </a:r>
-            <a:r>
-              <a:rPr lang="pl-PL" dirty="0"/>
-              <a:t>])</a:t>
-            </a:r>
-          </a:p>
-          <a:p>
-            <a:pPr marL="0" indent="0">
-              <a:buNone/>
-            </a:pPr>
-            <a:r>
-              <a:rPr lang="pl-PL" dirty="0"/>
-              <a:t>end.</a:t>
-            </a:r>
-          </a:p>
-        </p:txBody>
-      </p:sp>
-    </p:spTree>
-    <p:extLst>
-      <p:ext uri="{BB962C8B-B14F-4D97-AF65-F5344CB8AC3E}">
-        <p14:creationId xmlns:p14="http://schemas.microsoft.com/office/powerpoint/2010/main" val="2859846394"/>
       </p:ext>
     </p:extLst>
   </p:cSld>

--- a/Nowoczesna obsługa błędów w języku Python przy użyciu... torów/Rail Oriented Programming.pptx
+++ b/Nowoczesna obsługa błędów w języku Python przy użyciu... torów/Rail Oriented Programming.pptx
@@ -4138,141 +4138,6 @@
           <a:chExt cx="0" cy="0"/>
         </a:xfrm>
       </p:grpSpPr>
-      <p:sp>
-        <p:nvSpPr>
-          <p:cNvPr id="2" name="Title 1"/>
-          <p:cNvSpPr>
-            <a:spLocks noGrp="1"/>
-          </p:cNvSpPr>
-          <p:nvPr>
-            <p:ph type="ctrTitle"/>
-          </p:nvPr>
-        </p:nvSpPr>
-        <p:spPr/>
-        <p:txBody>
-          <a:bodyPr/>
-          <a:lstStyle/>
-          <a:p>
-            <a:r>
-              <a:rPr dirty="0"/>
-              <a:t>Rail Oriented Programming</a:t>
-            </a:r>
-          </a:p>
-        </p:txBody>
-      </p:sp>
-      <p:sp>
-        <p:nvSpPr>
-          <p:cNvPr id="3" name="Subtitle 2"/>
-          <p:cNvSpPr>
-            <a:spLocks noGrp="1"/>
-          </p:cNvSpPr>
-          <p:nvPr>
-            <p:ph type="subTitle" idx="1"/>
-          </p:nvPr>
-        </p:nvSpPr>
-        <p:spPr>
-          <a:xfrm>
-            <a:off x="802386" y="4389120"/>
-            <a:ext cx="7732014" cy="1783080"/>
-          </a:xfrm>
-        </p:spPr>
-        <p:txBody>
-          <a:bodyPr>
-            <a:normAutofit fontScale="70000" lnSpcReduction="20000"/>
-          </a:bodyPr>
-          <a:lstStyle/>
-          <a:p>
-            <a:pPr>
-              <a:lnSpc>
-                <a:spcPct val="120000"/>
-              </a:lnSpc>
-            </a:pPr>
-            <a:r>
-              <a:rPr lang="pl-PL" sz="2600" dirty="0">
-                <a:latin typeface="Segoe UI Semibold" panose="020B0702040204020203" pitchFamily="34" charset="0"/>
-                <a:cs typeface="Segoe UI Semibold" panose="020B0702040204020203" pitchFamily="34" charset="0"/>
-              </a:rPr>
-              <a:t>Nowoczesna obsługa błędów w języku </a:t>
-            </a:r>
-            <a:r>
-              <a:rPr lang="pl-PL" sz="2600" dirty="0" err="1">
-                <a:latin typeface="Segoe UI Semibold" panose="020B0702040204020203" pitchFamily="34" charset="0"/>
-                <a:cs typeface="Segoe UI Semibold" panose="020B0702040204020203" pitchFamily="34" charset="0"/>
-              </a:rPr>
-              <a:t>Python</a:t>
-            </a:r>
-            <a:r>
-              <a:rPr lang="pl-PL" sz="2600" dirty="0">
-                <a:latin typeface="Segoe UI Semibold" panose="020B0702040204020203" pitchFamily="34" charset="0"/>
-                <a:cs typeface="Segoe UI Semibold" panose="020B0702040204020203" pitchFamily="34" charset="0"/>
-              </a:rPr>
-              <a:t> przy użyciu... torów :)</a:t>
-            </a:r>
-          </a:p>
-          <a:p>
-            <a:pPr>
-              <a:lnSpc>
-                <a:spcPct val="120000"/>
-              </a:lnSpc>
-            </a:pPr>
-            <a:r>
-              <a:rPr lang="fr-FR" sz="2900" dirty="0">
-                <a:latin typeface="Segoe UI Semibold" panose="020B0702040204020203" pitchFamily="34" charset="0"/>
-                <a:cs typeface="Segoe UI Semibold" panose="020B0702040204020203" pitchFamily="34" charset="0"/>
-              </a:rPr>
-              <a:t>Artur Lew,</a:t>
-            </a:r>
-            <a:br>
-              <a:rPr lang="fr-FR" sz="2900" dirty="0">
-                <a:latin typeface="Segoe UI Semibold" panose="020B0702040204020203" pitchFamily="34" charset="0"/>
-                <a:cs typeface="Segoe UI Semibold" panose="020B0702040204020203" pitchFamily="34" charset="0"/>
-              </a:rPr>
-            </a:br>
-            <a:r>
-              <a:rPr lang="fr-FR" sz="2900" dirty="0" err="1">
-                <a:latin typeface="Segoe UI Semibold" panose="020B0702040204020203" pitchFamily="34" charset="0"/>
-                <a:cs typeface="Segoe UI Semibold" panose="020B0702040204020203" pitchFamily="34" charset="0"/>
-              </a:rPr>
-              <a:t>PyCon</a:t>
-            </a:r>
-            <a:r>
-              <a:rPr lang="fr-FR" sz="2900" dirty="0">
-                <a:latin typeface="Segoe UI Semibold" panose="020B0702040204020203" pitchFamily="34" charset="0"/>
-                <a:cs typeface="Segoe UI Semibold" panose="020B0702040204020203" pitchFamily="34" charset="0"/>
-              </a:rPr>
-              <a:t> PL 2025</a:t>
-            </a:r>
-            <a:endParaRPr lang="pl-PL" sz="2900" dirty="0">
-              <a:latin typeface="Segoe UI Semibold" panose="020B0702040204020203" pitchFamily="34" charset="0"/>
-              <a:cs typeface="Segoe UI Semibold" panose="020B0702040204020203" pitchFamily="34" charset="0"/>
-            </a:endParaRPr>
-          </a:p>
-          <a:p>
-            <a:pPr>
-              <a:lnSpc>
-                <a:spcPct val="120000"/>
-              </a:lnSpc>
-            </a:pPr>
-            <a:r>
-              <a:rPr lang="pl-PL" sz="2300" dirty="0">
-                <a:latin typeface="Segoe UI Semibold" panose="020B0702040204020203" pitchFamily="34" charset="0"/>
-                <a:cs typeface="Segoe UI Semibold" panose="020B0702040204020203" pitchFamily="34" charset="0"/>
-              </a:rPr>
-              <a:t>Gliwice 30.08</a:t>
-            </a:r>
-            <a:endParaRPr lang="fr-FR" sz="2300" dirty="0">
-              <a:latin typeface="Segoe UI Semibold" panose="020B0702040204020203" pitchFamily="34" charset="0"/>
-              <a:cs typeface="Segoe UI Semibold" panose="020B0702040204020203" pitchFamily="34" charset="0"/>
-            </a:endParaRPr>
-          </a:p>
-          <a:p>
-            <a:endParaRPr dirty="0">
-              <a:latin typeface="Segoe UI Semibold" panose="020B0702040204020203" pitchFamily="34" charset="0"/>
-              <a:cs typeface="Segoe UI Semibold" panose="020B0702040204020203" pitchFamily="34" charset="0"/>
-            </a:endParaRPr>
-          </a:p>
-        </p:txBody>
-      </p:sp>
       <p:pic>
         <p:nvPicPr>
           <p:cNvPr id="5" name="Grafika 4">
@@ -4309,6 +4174,149 @@
           </a:prstGeom>
         </p:spPr>
       </p:pic>
+      <p:sp>
+        <p:nvSpPr>
+          <p:cNvPr id="2" name="Title 1"/>
+          <p:cNvSpPr>
+            <a:spLocks noGrp="1"/>
+          </p:cNvSpPr>
+          <p:nvPr>
+            <p:ph type="ctrTitle"/>
+          </p:nvPr>
+        </p:nvSpPr>
+        <p:spPr/>
+        <p:txBody>
+          <a:bodyPr/>
+          <a:lstStyle/>
+          <a:p>
+            <a:r>
+              <a:rPr dirty="0"/>
+              <a:t>Rail</a:t>
+            </a:r>
+            <a:r>
+              <a:rPr lang="pl-PL" dirty="0"/>
+              <a:t>WAY</a:t>
+            </a:r>
+            <a:r>
+              <a:rPr dirty="0"/>
+              <a:t> Oriented Programming</a:t>
+            </a:r>
+          </a:p>
+        </p:txBody>
+      </p:sp>
+      <p:sp>
+        <p:nvSpPr>
+          <p:cNvPr id="3" name="Subtitle 2"/>
+          <p:cNvSpPr>
+            <a:spLocks noGrp="1"/>
+          </p:cNvSpPr>
+          <p:nvPr>
+            <p:ph type="subTitle" idx="1"/>
+          </p:nvPr>
+        </p:nvSpPr>
+        <p:spPr>
+          <a:xfrm>
+            <a:off x="802386" y="4389120"/>
+            <a:ext cx="7732014" cy="1783080"/>
+          </a:xfrm>
+        </p:spPr>
+        <p:txBody>
+          <a:bodyPr>
+            <a:normAutofit fontScale="70000" lnSpcReduction="20000"/>
+          </a:bodyPr>
+          <a:lstStyle/>
+          <a:p>
+            <a:pPr>
+              <a:lnSpc>
+                <a:spcPct val="120000"/>
+              </a:lnSpc>
+            </a:pPr>
+            <a:r>
+              <a:rPr lang="pl-PL" sz="2600" dirty="0">
+                <a:latin typeface="Segoe UI Semibold" panose="020B0702040204020203" pitchFamily="34" charset="0"/>
+                <a:cs typeface="Segoe UI Semibold" panose="020B0702040204020203" pitchFamily="34" charset="0"/>
+              </a:rPr>
+              <a:t>Nowoczesna obsługa błędów w języku </a:t>
+            </a:r>
+            <a:r>
+              <a:rPr lang="pl-PL" sz="2600" dirty="0" err="1">
+                <a:latin typeface="Segoe UI Semibold" panose="020B0702040204020203" pitchFamily="34" charset="0"/>
+                <a:cs typeface="Segoe UI Semibold" panose="020B0702040204020203" pitchFamily="34" charset="0"/>
+              </a:rPr>
+              <a:t>Python</a:t>
+            </a:r>
+            <a:r>
+              <a:rPr lang="pl-PL" sz="2600" dirty="0">
+                <a:latin typeface="Segoe UI Semibold" panose="020B0702040204020203" pitchFamily="34" charset="0"/>
+                <a:cs typeface="Segoe UI Semibold" panose="020B0702040204020203" pitchFamily="34" charset="0"/>
+              </a:rPr>
+              <a:t> przy użyciu... torów :)</a:t>
+            </a:r>
+          </a:p>
+          <a:p>
+            <a:pPr>
+              <a:lnSpc>
+                <a:spcPct val="120000"/>
+              </a:lnSpc>
+            </a:pPr>
+            <a:r>
+              <a:rPr lang="fr-FR" sz="2900" dirty="0">
+                <a:latin typeface="Segoe UI Semibold" panose="020B0702040204020203" pitchFamily="34" charset="0"/>
+                <a:cs typeface="Segoe UI Semibold" panose="020B0702040204020203" pitchFamily="34" charset="0"/>
+              </a:rPr>
+              <a:t>Artur Lew,</a:t>
+            </a:r>
+            <a:br>
+              <a:rPr lang="fr-FR" sz="2900" dirty="0">
+                <a:latin typeface="Segoe UI Semibold" panose="020B0702040204020203" pitchFamily="34" charset="0"/>
+                <a:cs typeface="Segoe UI Semibold" panose="020B0702040204020203" pitchFamily="34" charset="0"/>
+              </a:rPr>
+            </a:br>
+            <a:r>
+              <a:rPr lang="fr-FR" sz="2900" dirty="0" err="1">
+                <a:latin typeface="Segoe UI Semibold" panose="020B0702040204020203" pitchFamily="34" charset="0"/>
+                <a:cs typeface="Segoe UI Semibold" panose="020B0702040204020203" pitchFamily="34" charset="0"/>
+              </a:rPr>
+              <a:t>PyCon</a:t>
+            </a:r>
+            <a:r>
+              <a:rPr lang="fr-FR" sz="2900" dirty="0">
+                <a:latin typeface="Segoe UI Semibold" panose="020B0702040204020203" pitchFamily="34" charset="0"/>
+                <a:cs typeface="Segoe UI Semibold" panose="020B0702040204020203" pitchFamily="34" charset="0"/>
+              </a:rPr>
+              <a:t> PL 2025</a:t>
+            </a:r>
+            <a:endParaRPr lang="pl-PL" sz="2900" dirty="0">
+              <a:latin typeface="Segoe UI Semibold" panose="020B0702040204020203" pitchFamily="34" charset="0"/>
+              <a:cs typeface="Segoe UI Semibold" panose="020B0702040204020203" pitchFamily="34" charset="0"/>
+            </a:endParaRPr>
+          </a:p>
+          <a:p>
+            <a:pPr>
+              <a:lnSpc>
+                <a:spcPct val="120000"/>
+              </a:lnSpc>
+            </a:pPr>
+            <a:r>
+              <a:rPr lang="pl-PL" sz="2300" dirty="0">
+                <a:latin typeface="Segoe UI Semibold" panose="020B0702040204020203" pitchFamily="34" charset="0"/>
+                <a:cs typeface="Segoe UI Semibold" panose="020B0702040204020203" pitchFamily="34" charset="0"/>
+              </a:rPr>
+              <a:t>Gliwice 30.08</a:t>
+            </a:r>
+            <a:endParaRPr lang="fr-FR" sz="2300" dirty="0">
+              <a:latin typeface="Segoe UI Semibold" panose="020B0702040204020203" pitchFamily="34" charset="0"/>
+              <a:cs typeface="Segoe UI Semibold" panose="020B0702040204020203" pitchFamily="34" charset="0"/>
+            </a:endParaRPr>
+          </a:p>
+          <a:p>
+            <a:endParaRPr dirty="0">
+              <a:latin typeface="Segoe UI Semibold" panose="020B0702040204020203" pitchFamily="34" charset="0"/>
+              <a:cs typeface="Segoe UI Semibold" panose="020B0702040204020203" pitchFamily="34" charset="0"/>
+            </a:endParaRPr>
+          </a:p>
+        </p:txBody>
+      </p:sp>
     </p:spTree>
   </p:cSld>
   <p:clrMapOvr>
@@ -5016,7 +5024,15 @@
           <a:p>
             <a:r>
               <a:rPr dirty="0"/>
-              <a:t>Rail Oriented Programming (ROP)</a:t>
+              <a:t>Rail</a:t>
+            </a:r>
+            <a:r>
+              <a:rPr lang="pl-PL" dirty="0"/>
+              <a:t>WAY</a:t>
+            </a:r>
+            <a:r>
+              <a:rPr dirty="0"/>
+              <a:t> Oriented Programming (ROP)</a:t>
             </a:r>
           </a:p>
         </p:txBody>
